--- a/MonteCarlo/MonteCarloProj/Presentation for West River.pptx
+++ b/MonteCarlo/MonteCarloProj/Presentation for West River.pptx
@@ -312,7 +312,7 @@
           <a:p>
             <a:fld id="{658E1C9A-47F7-4494-B9B8-0D060B88ACB1}" type="datetimeFigureOut">
               <a:rPr lang="en-US" smtClean="0"/>
-              <a:t>8/17/2026</a:t>
+              <a:t>9/10/2026</a:t>
             </a:fld>
             <a:endParaRPr lang="en-US"/>
           </a:p>
@@ -587,7 +587,7 @@
           <a:p>
             <a:fld id="{658E1C9A-47F7-4494-B9B8-0D060B88ACB1}" type="datetimeFigureOut">
               <a:rPr lang="en-US" smtClean="0"/>
-              <a:t>8/17/2026</a:t>
+              <a:t>9/10/2026</a:t>
             </a:fld>
             <a:endParaRPr lang="en-US"/>
           </a:p>
@@ -781,7 +781,7 @@
           <a:p>
             <a:fld id="{658E1C9A-47F7-4494-B9B8-0D060B88ACB1}" type="datetimeFigureOut">
               <a:rPr lang="en-US" smtClean="0"/>
-              <a:t>8/17/2026</a:t>
+              <a:t>9/10/2026</a:t>
             </a:fld>
             <a:endParaRPr lang="en-US"/>
           </a:p>
@@ -1054,7 +1054,7 @@
           <a:p>
             <a:fld id="{658E1C9A-47F7-4494-B9B8-0D060B88ACB1}" type="datetimeFigureOut">
               <a:rPr lang="en-US" smtClean="0"/>
-              <a:t>8/17/2026</a:t>
+              <a:t>9/10/2026</a:t>
             </a:fld>
             <a:endParaRPr lang="en-US"/>
           </a:p>
@@ -1395,7 +1395,7 @@
           <a:p>
             <a:fld id="{658E1C9A-47F7-4494-B9B8-0D060B88ACB1}" type="datetimeFigureOut">
               <a:rPr lang="en-US" smtClean="0"/>
-              <a:t>8/17/2026</a:t>
+              <a:t>9/10/2026</a:t>
             </a:fld>
             <a:endParaRPr lang="en-US"/>
           </a:p>
@@ -2018,7 +2018,7 @@
           <a:p>
             <a:fld id="{658E1C9A-47F7-4494-B9B8-0D060B88ACB1}" type="datetimeFigureOut">
               <a:rPr lang="en-US" smtClean="0"/>
-              <a:t>8/17/2026</a:t>
+              <a:t>9/10/2026</a:t>
             </a:fld>
             <a:endParaRPr lang="en-US"/>
           </a:p>
@@ -2878,7 +2878,7 @@
           <a:p>
             <a:fld id="{658E1C9A-47F7-4494-B9B8-0D060B88ACB1}" type="datetimeFigureOut">
               <a:rPr lang="en-US" smtClean="0"/>
-              <a:t>8/17/2026</a:t>
+              <a:t>9/10/2026</a:t>
             </a:fld>
             <a:endParaRPr lang="en-US"/>
           </a:p>
@@ -3048,7 +3048,7 @@
           <a:p>
             <a:fld id="{658E1C9A-47F7-4494-B9B8-0D060B88ACB1}" type="datetimeFigureOut">
               <a:rPr lang="en-US" smtClean="0"/>
-              <a:t>8/17/2026</a:t>
+              <a:t>9/10/2026</a:t>
             </a:fld>
             <a:endParaRPr lang="en-US"/>
           </a:p>
@@ -3228,7 +3228,7 @@
           <a:p>
             <a:fld id="{658E1C9A-47F7-4494-B9B8-0D060B88ACB1}" type="datetimeFigureOut">
               <a:rPr lang="en-US" smtClean="0"/>
-              <a:t>8/17/2026</a:t>
+              <a:t>9/10/2026</a:t>
             </a:fld>
             <a:endParaRPr lang="en-US"/>
           </a:p>
@@ -3398,7 +3398,7 @@
           <a:p>
             <a:fld id="{658E1C9A-47F7-4494-B9B8-0D060B88ACB1}" type="datetimeFigureOut">
               <a:rPr lang="en-US" smtClean="0"/>
-              <a:t>8/17/2026</a:t>
+              <a:t>9/10/2026</a:t>
             </a:fld>
             <a:endParaRPr lang="en-US"/>
           </a:p>
@@ -3645,7 +3645,7 @@
           <a:p>
             <a:fld id="{658E1C9A-47F7-4494-B9B8-0D060B88ACB1}" type="datetimeFigureOut">
               <a:rPr lang="en-US" smtClean="0"/>
-              <a:t>8/17/2026</a:t>
+              <a:t>9/10/2026</a:t>
             </a:fld>
             <a:endParaRPr lang="en-US"/>
           </a:p>
@@ -3937,7 +3937,7 @@
           <a:p>
             <a:fld id="{658E1C9A-47F7-4494-B9B8-0D060B88ACB1}" type="datetimeFigureOut">
               <a:rPr lang="en-US" smtClean="0"/>
-              <a:t>8/17/2026</a:t>
+              <a:t>9/10/2026</a:t>
             </a:fld>
             <a:endParaRPr lang="en-US"/>
           </a:p>
@@ -4381,7 +4381,7 @@
           <a:p>
             <a:fld id="{658E1C9A-47F7-4494-B9B8-0D060B88ACB1}" type="datetimeFigureOut">
               <a:rPr lang="en-US" smtClean="0"/>
-              <a:t>8/17/2026</a:t>
+              <a:t>9/10/2026</a:t>
             </a:fld>
             <a:endParaRPr lang="en-US"/>
           </a:p>
@@ -4499,7 +4499,7 @@
           <a:p>
             <a:fld id="{658E1C9A-47F7-4494-B9B8-0D060B88ACB1}" type="datetimeFigureOut">
               <a:rPr lang="en-US" smtClean="0"/>
-              <a:t>8/17/2026</a:t>
+              <a:t>9/10/2026</a:t>
             </a:fld>
             <a:endParaRPr lang="en-US"/>
           </a:p>
@@ -4594,7 +4594,7 @@
           <a:p>
             <a:fld id="{658E1C9A-47F7-4494-B9B8-0D060B88ACB1}" type="datetimeFigureOut">
               <a:rPr lang="en-US" smtClean="0"/>
-              <a:t>8/17/2026</a:t>
+              <a:t>9/10/2026</a:t>
             </a:fld>
             <a:endParaRPr lang="en-US"/>
           </a:p>
@@ -4873,7 +4873,7 @@
           <a:p>
             <a:fld id="{658E1C9A-47F7-4494-B9B8-0D060B88ACB1}" type="datetimeFigureOut">
               <a:rPr lang="en-US" smtClean="0"/>
-              <a:t>8/17/2026</a:t>
+              <a:t>9/10/2026</a:t>
             </a:fld>
             <a:endParaRPr lang="en-US"/>
           </a:p>
@@ -5148,7 +5148,7 @@
           <a:p>
             <a:fld id="{658E1C9A-47F7-4494-B9B8-0D060B88ACB1}" type="datetimeFigureOut">
               <a:rPr lang="en-US" smtClean="0"/>
-              <a:t>8/17/2026</a:t>
+              <a:t>9/10/2026</a:t>
             </a:fld>
             <a:endParaRPr lang="en-US"/>
           </a:p>
@@ -5591,7 +5591,7 @@
           <a:p>
             <a:fld id="{658E1C9A-47F7-4494-B9B8-0D060B88ACB1}" type="datetimeFigureOut">
               <a:rPr lang="en-US" smtClean="0"/>
-              <a:t>8/17/2026</a:t>
+              <a:t>9/10/2026</a:t>
             </a:fld>
             <a:endParaRPr lang="en-US"/>
           </a:p>
@@ -11187,10 +11187,10 @@
       </p:sp>
       <p:sp>
         <p:nvSpPr>
-          <p:cNvPr id="24" name="Oval 23">
+          <p:cNvPr id="35" name="Rectangle 34">
             <a:extLst>
               <a:ext uri="{FF2B5EF4-FFF2-40B4-BE49-F238E27FC236}">
-                <a16:creationId xmlns:a16="http://schemas.microsoft.com/office/drawing/2014/main" id="{BCC69295-87F7-9907-EC07-BD0F3FDC64FA}"/>
+                <a16:creationId xmlns:a16="http://schemas.microsoft.com/office/drawing/2014/main" id="{0983F79C-7AA7-23F4-31D4-6DD263900530}"/>
               </a:ext>
             </a:extLst>
           </p:cNvPr>
@@ -11198,11 +11198,11 @@
           <p:nvPr/>
         </p:nvSpPr>
         <p:spPr>
-          <a:xfrm>
-            <a:off x="5428233" y="3945389"/>
-            <a:ext cx="1799771" cy="508000"/>
-          </a:xfrm>
-          <a:prstGeom prst="ellipse">
+          <a:xfrm rot="5400000">
+            <a:off x="8683210" y="4037835"/>
+            <a:ext cx="232229" cy="2621364"/>
+          </a:xfrm>
+          <a:prstGeom prst="rect">
             <a:avLst/>
           </a:prstGeom>
         </p:spPr>
@@ -11227,19 +11227,16 @@
           <a:lstStyle/>
           <a:p>
             <a:pPr algn="ctr"/>
-            <a:r>
-              <a:rPr lang="en-US" dirty="0"/>
-              <a:t>Detector</a:t>
-            </a:r>
-          </a:p>
-        </p:txBody>
-      </p:sp>
-      <p:sp>
-        <p:nvSpPr>
-          <p:cNvPr id="26" name="Oval 25">
+            <a:endParaRPr lang="en-US"/>
+          </a:p>
+        </p:txBody>
+      </p:sp>
+      <p:sp>
+        <p:nvSpPr>
+          <p:cNvPr id="37" name="Rectangle 36">
             <a:extLst>
               <a:ext uri="{FF2B5EF4-FFF2-40B4-BE49-F238E27FC236}">
-                <a16:creationId xmlns:a16="http://schemas.microsoft.com/office/drawing/2014/main" id="{727C8728-98BD-D133-1C9F-D16EDBD6043E}"/>
+                <a16:creationId xmlns:a16="http://schemas.microsoft.com/office/drawing/2014/main" id="{5DFE40C5-9AA7-54A5-AF84-0EF622F49558}"/>
               </a:ext>
             </a:extLst>
           </p:cNvPr>
@@ -11247,107 +11244,9 @@
           <p:nvPr/>
         </p:nvSpPr>
         <p:spPr>
-          <a:xfrm>
-            <a:off x="3515363" y="4070666"/>
-            <a:ext cx="1799771" cy="508000"/>
-          </a:xfrm>
-          <a:prstGeom prst="ellipse">
-            <a:avLst/>
-          </a:prstGeom>
-        </p:spPr>
-        <p:style>
-          <a:lnRef idx="2">
-            <a:schemeClr val="dk1">
-              <a:shade val="15000"/>
-            </a:schemeClr>
-          </a:lnRef>
-          <a:fillRef idx="1">
-            <a:schemeClr val="dk1"/>
-          </a:fillRef>
-          <a:effectRef idx="0">
-            <a:schemeClr val="dk1"/>
-          </a:effectRef>
-          <a:fontRef idx="minor">
-            <a:schemeClr val="lt1"/>
-          </a:fontRef>
-        </p:style>
-        <p:txBody>
-          <a:bodyPr rtlCol="0" anchor="ctr"/>
-          <a:lstStyle/>
-          <a:p>
-            <a:pPr algn="ctr"/>
-            <a:r>
-              <a:rPr lang="en-US" dirty="0"/>
-              <a:t>Detector</a:t>
-            </a:r>
-          </a:p>
-        </p:txBody>
-      </p:sp>
-      <p:sp>
-        <p:nvSpPr>
-          <p:cNvPr id="28" name="Oval 27">
-            <a:extLst>
-              <a:ext uri="{FF2B5EF4-FFF2-40B4-BE49-F238E27FC236}">
-                <a16:creationId xmlns:a16="http://schemas.microsoft.com/office/drawing/2014/main" id="{E0124D9B-A28A-B64A-05C2-84CFAD1C5FBC}"/>
-              </a:ext>
-            </a:extLst>
-          </p:cNvPr>
-          <p:cNvSpPr/>
-          <p:nvPr/>
-        </p:nvSpPr>
-        <p:spPr>
-          <a:xfrm>
-            <a:off x="1654628" y="4070666"/>
-            <a:ext cx="1799771" cy="508000"/>
-          </a:xfrm>
-          <a:prstGeom prst="ellipse">
-            <a:avLst/>
-          </a:prstGeom>
-        </p:spPr>
-        <p:style>
-          <a:lnRef idx="2">
-            <a:schemeClr val="dk1">
-              <a:shade val="15000"/>
-            </a:schemeClr>
-          </a:lnRef>
-          <a:fillRef idx="1">
-            <a:schemeClr val="dk1"/>
-          </a:fillRef>
-          <a:effectRef idx="0">
-            <a:schemeClr val="dk1"/>
-          </a:effectRef>
-          <a:fontRef idx="minor">
-            <a:schemeClr val="lt1"/>
-          </a:fontRef>
-        </p:style>
-        <p:txBody>
-          <a:bodyPr rtlCol="0" anchor="ctr"/>
-          <a:lstStyle/>
-          <a:p>
-            <a:pPr algn="ctr"/>
-            <a:r>
-              <a:rPr lang="en-US" dirty="0"/>
-              <a:t>Detector</a:t>
-            </a:r>
-          </a:p>
-        </p:txBody>
-      </p:sp>
-      <p:sp>
-        <p:nvSpPr>
-          <p:cNvPr id="35" name="Rectangle 34">
-            <a:extLst>
-              <a:ext uri="{FF2B5EF4-FFF2-40B4-BE49-F238E27FC236}">
-                <a16:creationId xmlns:a16="http://schemas.microsoft.com/office/drawing/2014/main" id="{0983F79C-7AA7-23F4-31D4-6DD263900530}"/>
-              </a:ext>
-            </a:extLst>
-          </p:cNvPr>
-          <p:cNvSpPr/>
-          <p:nvPr/>
-        </p:nvSpPr>
-        <p:spPr>
           <a:xfrm rot="5400000">
-            <a:off x="8683210" y="4037835"/>
-            <a:ext cx="232229" cy="2621364"/>
+            <a:off x="8346723" y="4095737"/>
+            <a:ext cx="232230" cy="1895724"/>
           </a:xfrm>
           <a:prstGeom prst="rect">
             <a:avLst/>
@@ -11380,10 +11279,10 @@
       </p:sp>
       <p:sp>
         <p:nvSpPr>
-          <p:cNvPr id="37" name="Rectangle 36">
+          <p:cNvPr id="41" name="Rectangle 40">
             <a:extLst>
               <a:ext uri="{FF2B5EF4-FFF2-40B4-BE49-F238E27FC236}">
-                <a16:creationId xmlns:a16="http://schemas.microsoft.com/office/drawing/2014/main" id="{5DFE40C5-9AA7-54A5-AF84-0EF622F49558}"/>
+                <a16:creationId xmlns:a16="http://schemas.microsoft.com/office/drawing/2014/main" id="{9764218F-F695-1655-8B32-047384F002B3}"/>
               </a:ext>
             </a:extLst>
           </p:cNvPr>
@@ -11392,8 +11291,8 @@
         </p:nvSpPr>
         <p:spPr>
           <a:xfrm rot="5400000">
-            <a:off x="8346723" y="4095737"/>
-            <a:ext cx="232230" cy="1895724"/>
+            <a:off x="7955550" y="4154559"/>
+            <a:ext cx="190518" cy="1209960"/>
           </a:xfrm>
           <a:prstGeom prst="rect">
             <a:avLst/>
@@ -11426,10 +11325,10 @@
       </p:sp>
       <p:sp>
         <p:nvSpPr>
-          <p:cNvPr id="41" name="Rectangle 40">
+          <p:cNvPr id="43" name="Rectangle 42">
             <a:extLst>
               <a:ext uri="{FF2B5EF4-FFF2-40B4-BE49-F238E27FC236}">
-                <a16:creationId xmlns:a16="http://schemas.microsoft.com/office/drawing/2014/main" id="{9764218F-F695-1655-8B32-047384F002B3}"/>
+                <a16:creationId xmlns:a16="http://schemas.microsoft.com/office/drawing/2014/main" id="{FBDEBEE8-F4CB-F001-CA5E-2FE33C094105}"/>
               </a:ext>
             </a:extLst>
           </p:cNvPr>
@@ -11438,8 +11337,8 @@
         </p:nvSpPr>
         <p:spPr>
           <a:xfrm rot="5400000">
-            <a:off x="7955550" y="4154559"/>
-            <a:ext cx="190518" cy="1209960"/>
+            <a:off x="8346723" y="4723651"/>
+            <a:ext cx="232230" cy="1895724"/>
           </a:xfrm>
           <a:prstGeom prst="rect">
             <a:avLst/>
@@ -11472,10 +11371,10 @@
       </p:sp>
       <p:sp>
         <p:nvSpPr>
-          <p:cNvPr id="43" name="Rectangle 42">
+          <p:cNvPr id="45" name="Rectangle 44">
             <a:extLst>
               <a:ext uri="{FF2B5EF4-FFF2-40B4-BE49-F238E27FC236}">
-                <a16:creationId xmlns:a16="http://schemas.microsoft.com/office/drawing/2014/main" id="{FBDEBEE8-F4CB-F001-CA5E-2FE33C094105}"/>
+                <a16:creationId xmlns:a16="http://schemas.microsoft.com/office/drawing/2014/main" id="{B9591057-B4D9-347A-7B43-03C7292C335F}"/>
               </a:ext>
             </a:extLst>
           </p:cNvPr>
@@ -11484,8 +11383,8 @@
         </p:nvSpPr>
         <p:spPr>
           <a:xfrm rot="5400000">
-            <a:off x="8346723" y="4723651"/>
-            <a:ext cx="232230" cy="1895724"/>
+            <a:off x="7959903" y="5397589"/>
+            <a:ext cx="190518" cy="1209960"/>
           </a:xfrm>
           <a:prstGeom prst="rect">
             <a:avLst/>
@@ -11513,101 +11412,6 @@
           <a:p>
             <a:pPr algn="ctr"/>
             <a:endParaRPr lang="en-US"/>
-          </a:p>
-        </p:txBody>
-      </p:sp>
-      <p:sp>
-        <p:nvSpPr>
-          <p:cNvPr id="45" name="Rectangle 44">
-            <a:extLst>
-              <a:ext uri="{FF2B5EF4-FFF2-40B4-BE49-F238E27FC236}">
-                <a16:creationId xmlns:a16="http://schemas.microsoft.com/office/drawing/2014/main" id="{B9591057-B4D9-347A-7B43-03C7292C335F}"/>
-              </a:ext>
-            </a:extLst>
-          </p:cNvPr>
-          <p:cNvSpPr/>
-          <p:nvPr/>
-        </p:nvSpPr>
-        <p:spPr>
-          <a:xfrm rot="5400000">
-            <a:off x="7959903" y="5397589"/>
-            <a:ext cx="190518" cy="1209960"/>
-          </a:xfrm>
-          <a:prstGeom prst="rect">
-            <a:avLst/>
-          </a:prstGeom>
-        </p:spPr>
-        <p:style>
-          <a:lnRef idx="2">
-            <a:schemeClr val="accent1">
-              <a:shade val="15000"/>
-            </a:schemeClr>
-          </a:lnRef>
-          <a:fillRef idx="1">
-            <a:schemeClr val="accent1"/>
-          </a:fillRef>
-          <a:effectRef idx="0">
-            <a:schemeClr val="accent1"/>
-          </a:effectRef>
-          <a:fontRef idx="minor">
-            <a:schemeClr val="lt1"/>
-          </a:fontRef>
-        </p:style>
-        <p:txBody>
-          <a:bodyPr rtlCol="0" anchor="ctr"/>
-          <a:lstStyle/>
-          <a:p>
-            <a:pPr algn="ctr"/>
-            <a:endParaRPr lang="en-US"/>
-          </a:p>
-        </p:txBody>
-      </p:sp>
-      <p:sp>
-        <p:nvSpPr>
-          <p:cNvPr id="33" name="Oval 32">
-            <a:extLst>
-              <a:ext uri="{FF2B5EF4-FFF2-40B4-BE49-F238E27FC236}">
-                <a16:creationId xmlns:a16="http://schemas.microsoft.com/office/drawing/2014/main" id="{703904B2-931C-4EB7-0677-0CB8714306B6}"/>
-              </a:ext>
-            </a:extLst>
-          </p:cNvPr>
-          <p:cNvSpPr/>
-          <p:nvPr/>
-        </p:nvSpPr>
-        <p:spPr>
-          <a:xfrm rot="5400000">
-            <a:off x="7069485" y="5152932"/>
-            <a:ext cx="838315" cy="431077"/>
-          </a:xfrm>
-          <a:prstGeom prst="ellipse">
-            <a:avLst/>
-          </a:prstGeom>
-        </p:spPr>
-        <p:style>
-          <a:lnRef idx="2">
-            <a:schemeClr val="dk1">
-              <a:shade val="15000"/>
-            </a:schemeClr>
-          </a:lnRef>
-          <a:fillRef idx="1">
-            <a:schemeClr val="dk1"/>
-          </a:fillRef>
-          <a:effectRef idx="0">
-            <a:schemeClr val="dk1"/>
-          </a:effectRef>
-          <a:fontRef idx="minor">
-            <a:schemeClr val="lt1"/>
-          </a:fontRef>
-        </p:style>
-        <p:txBody>
-          <a:bodyPr rtlCol="0" anchor="ctr"/>
-          <a:lstStyle/>
-          <a:p>
-            <a:pPr algn="ctr"/>
-            <a:r>
-              <a:rPr lang="en-US" dirty="0"/>
-              <a:t>Det</a:t>
-            </a:r>
           </a:p>
         </p:txBody>
       </p:sp>
@@ -11862,7 +11666,6 @@
           </p:cNvPr>
           <p:cNvCxnSpPr>
             <a:cxnSpLocks/>
-            <a:endCxn id="24" idx="4"/>
           </p:cNvCxnSpPr>
           <p:nvPr/>
         </p:nvCxnSpPr>

--- a/MonteCarlo/MonteCarloProj/Presentation for West River.pptx
+++ b/MonteCarlo/MonteCarloProj/Presentation for West River.pptx
@@ -20,6 +20,9 @@
     <p:sldId id="258" r:id="rId14"/>
     <p:sldId id="260" r:id="rId15"/>
     <p:sldId id="261" r:id="rId16"/>
+    <p:sldId id="279" r:id="rId17"/>
+    <p:sldId id="280" r:id="rId18"/>
+    <p:sldId id="281" r:id="rId19"/>
   </p:sldIdLst>
   <p:sldSz cx="12192000" cy="6858000"/>
   <p:notesSz cx="6858000" cy="9144000"/>
@@ -312,7 +315,7 @@
           <a:p>
             <a:fld id="{658E1C9A-47F7-4494-B9B8-0D060B88ACB1}" type="datetimeFigureOut">
               <a:rPr lang="en-US" smtClean="0"/>
-              <a:t>9/10/2026</a:t>
+              <a:t>9/26/2026</a:t>
             </a:fld>
             <a:endParaRPr lang="en-US"/>
           </a:p>
@@ -587,7 +590,7 @@
           <a:p>
             <a:fld id="{658E1C9A-47F7-4494-B9B8-0D060B88ACB1}" type="datetimeFigureOut">
               <a:rPr lang="en-US" smtClean="0"/>
-              <a:t>9/10/2026</a:t>
+              <a:t>9/26/2026</a:t>
             </a:fld>
             <a:endParaRPr lang="en-US"/>
           </a:p>
@@ -781,7 +784,7 @@
           <a:p>
             <a:fld id="{658E1C9A-47F7-4494-B9B8-0D060B88ACB1}" type="datetimeFigureOut">
               <a:rPr lang="en-US" smtClean="0"/>
-              <a:t>9/10/2026</a:t>
+              <a:t>9/26/2026</a:t>
             </a:fld>
             <a:endParaRPr lang="en-US"/>
           </a:p>
@@ -1054,7 +1057,7 @@
           <a:p>
             <a:fld id="{658E1C9A-47F7-4494-B9B8-0D060B88ACB1}" type="datetimeFigureOut">
               <a:rPr lang="en-US" smtClean="0"/>
-              <a:t>9/10/2026</a:t>
+              <a:t>9/26/2026</a:t>
             </a:fld>
             <a:endParaRPr lang="en-US"/>
           </a:p>
@@ -1395,7 +1398,7 @@
           <a:p>
             <a:fld id="{658E1C9A-47F7-4494-B9B8-0D060B88ACB1}" type="datetimeFigureOut">
               <a:rPr lang="en-US" smtClean="0"/>
-              <a:t>9/10/2026</a:t>
+              <a:t>9/26/2026</a:t>
             </a:fld>
             <a:endParaRPr lang="en-US"/>
           </a:p>
@@ -2018,7 +2021,7 @@
           <a:p>
             <a:fld id="{658E1C9A-47F7-4494-B9B8-0D060B88ACB1}" type="datetimeFigureOut">
               <a:rPr lang="en-US" smtClean="0"/>
-              <a:t>9/10/2026</a:t>
+              <a:t>9/26/2026</a:t>
             </a:fld>
             <a:endParaRPr lang="en-US"/>
           </a:p>
@@ -2878,7 +2881,7 @@
           <a:p>
             <a:fld id="{658E1C9A-47F7-4494-B9B8-0D060B88ACB1}" type="datetimeFigureOut">
               <a:rPr lang="en-US" smtClean="0"/>
-              <a:t>9/10/2026</a:t>
+              <a:t>9/26/2026</a:t>
             </a:fld>
             <a:endParaRPr lang="en-US"/>
           </a:p>
@@ -3048,7 +3051,7 @@
           <a:p>
             <a:fld id="{658E1C9A-47F7-4494-B9B8-0D060B88ACB1}" type="datetimeFigureOut">
               <a:rPr lang="en-US" smtClean="0"/>
-              <a:t>9/10/2026</a:t>
+              <a:t>9/26/2026</a:t>
             </a:fld>
             <a:endParaRPr lang="en-US"/>
           </a:p>
@@ -3228,7 +3231,7 @@
           <a:p>
             <a:fld id="{658E1C9A-47F7-4494-B9B8-0D060B88ACB1}" type="datetimeFigureOut">
               <a:rPr lang="en-US" smtClean="0"/>
-              <a:t>9/10/2026</a:t>
+              <a:t>9/26/2026</a:t>
             </a:fld>
             <a:endParaRPr lang="en-US"/>
           </a:p>
@@ -3398,7 +3401,7 @@
           <a:p>
             <a:fld id="{658E1C9A-47F7-4494-B9B8-0D060B88ACB1}" type="datetimeFigureOut">
               <a:rPr lang="en-US" smtClean="0"/>
-              <a:t>9/10/2026</a:t>
+              <a:t>9/26/2026</a:t>
             </a:fld>
             <a:endParaRPr lang="en-US"/>
           </a:p>
@@ -3645,7 +3648,7 @@
           <a:p>
             <a:fld id="{658E1C9A-47F7-4494-B9B8-0D060B88ACB1}" type="datetimeFigureOut">
               <a:rPr lang="en-US" smtClean="0"/>
-              <a:t>9/10/2026</a:t>
+              <a:t>9/26/2026</a:t>
             </a:fld>
             <a:endParaRPr lang="en-US"/>
           </a:p>
@@ -3937,7 +3940,7 @@
           <a:p>
             <a:fld id="{658E1C9A-47F7-4494-B9B8-0D060B88ACB1}" type="datetimeFigureOut">
               <a:rPr lang="en-US" smtClean="0"/>
-              <a:t>9/10/2026</a:t>
+              <a:t>9/26/2026</a:t>
             </a:fld>
             <a:endParaRPr lang="en-US"/>
           </a:p>
@@ -4381,7 +4384,7 @@
           <a:p>
             <a:fld id="{658E1C9A-47F7-4494-B9B8-0D060B88ACB1}" type="datetimeFigureOut">
               <a:rPr lang="en-US" smtClean="0"/>
-              <a:t>9/10/2026</a:t>
+              <a:t>9/26/2026</a:t>
             </a:fld>
             <a:endParaRPr lang="en-US"/>
           </a:p>
@@ -4499,7 +4502,7 @@
           <a:p>
             <a:fld id="{658E1C9A-47F7-4494-B9B8-0D060B88ACB1}" type="datetimeFigureOut">
               <a:rPr lang="en-US" smtClean="0"/>
-              <a:t>9/10/2026</a:t>
+              <a:t>9/26/2026</a:t>
             </a:fld>
             <a:endParaRPr lang="en-US"/>
           </a:p>
@@ -4594,7 +4597,7 @@
           <a:p>
             <a:fld id="{658E1C9A-47F7-4494-B9B8-0D060B88ACB1}" type="datetimeFigureOut">
               <a:rPr lang="en-US" smtClean="0"/>
-              <a:t>9/10/2026</a:t>
+              <a:t>9/26/2026</a:t>
             </a:fld>
             <a:endParaRPr lang="en-US"/>
           </a:p>
@@ -4873,7 +4876,7 @@
           <a:p>
             <a:fld id="{658E1C9A-47F7-4494-B9B8-0D060B88ACB1}" type="datetimeFigureOut">
               <a:rPr lang="en-US" smtClean="0"/>
-              <a:t>9/10/2026</a:t>
+              <a:t>9/26/2026</a:t>
             </a:fld>
             <a:endParaRPr lang="en-US"/>
           </a:p>
@@ -5148,7 +5151,7 @@
           <a:p>
             <a:fld id="{658E1C9A-47F7-4494-B9B8-0D060B88ACB1}" type="datetimeFigureOut">
               <a:rPr lang="en-US" smtClean="0"/>
-              <a:t>9/10/2026</a:t>
+              <a:t>9/26/2026</a:t>
             </a:fld>
             <a:endParaRPr lang="en-US"/>
           </a:p>
@@ -5591,7 +5594,7 @@
           <a:p>
             <a:fld id="{658E1C9A-47F7-4494-B9B8-0D060B88ACB1}" type="datetimeFigureOut">
               <a:rPr lang="en-US" smtClean="0"/>
-              <a:t>9/10/2026</a:t>
+              <a:t>9/26/2026</a:t>
             </a:fld>
             <a:endParaRPr lang="en-US"/>
           </a:p>
@@ -7597,6 +7600,1538 @@
 </p:sld>
 </file>
 
+<file path=ppt/slides/slide16.xml><?xml version="1.0" encoding="utf-8"?>
+<p:sld xmlns:a="http://schemas.openxmlformats.org/drawingml/2006/main" xmlns:r="http://schemas.openxmlformats.org/officeDocument/2006/relationships" xmlns:p="http://schemas.openxmlformats.org/presentationml/2006/main">
+  <p:cSld>
+    <p:spTree>
+      <p:nvGrpSpPr>
+        <p:cNvPr id="1" name=""/>
+        <p:cNvGrpSpPr/>
+        <p:nvPr/>
+      </p:nvGrpSpPr>
+      <p:grpSpPr>
+        <a:xfrm>
+          <a:off x="0" y="0"/>
+          <a:ext cx="0" cy="0"/>
+          <a:chOff x="0" y="0"/>
+          <a:chExt cx="0" cy="0"/>
+        </a:xfrm>
+      </p:grpSpPr>
+      <p:pic>
+        <p:nvPicPr>
+          <p:cNvPr id="5" name="Picture 4">
+            <a:extLst>
+              <a:ext uri="{FF2B5EF4-FFF2-40B4-BE49-F238E27FC236}">
+                <a16:creationId xmlns:a16="http://schemas.microsoft.com/office/drawing/2014/main" id="{B81B274C-CE28-9F6D-3076-878C5449F4C1}"/>
+              </a:ext>
+            </a:extLst>
+          </p:cNvPr>
+          <p:cNvPicPr>
+            <a:picLocks noChangeAspect="1"/>
+          </p:cNvPicPr>
+          <p:nvPr/>
+        </p:nvPicPr>
+        <p:blipFill>
+          <a:blip r:embed="rId2"/>
+          <a:stretch>
+            <a:fillRect/>
+          </a:stretch>
+        </p:blipFill>
+        <p:spPr>
+          <a:xfrm>
+            <a:off x="2890814" y="1271571"/>
+            <a:ext cx="6410372" cy="4314857"/>
+          </a:xfrm>
+          <a:prstGeom prst="rect">
+            <a:avLst/>
+          </a:prstGeom>
+        </p:spPr>
+      </p:pic>
+    </p:spTree>
+    <p:extLst>
+      <p:ext uri="{BB962C8B-B14F-4D97-AF65-F5344CB8AC3E}">
+        <p14:creationId xmlns:p14="http://schemas.microsoft.com/office/powerpoint/2010/main" val="1636505624"/>
+      </p:ext>
+    </p:extLst>
+  </p:cSld>
+  <p:clrMapOvr>
+    <a:masterClrMapping/>
+  </p:clrMapOvr>
+</p:sld>
+</file>
+
+<file path=ppt/slides/slide17.xml><?xml version="1.0" encoding="utf-8"?>
+<p:sld xmlns:a="http://schemas.openxmlformats.org/drawingml/2006/main" xmlns:r="http://schemas.openxmlformats.org/officeDocument/2006/relationships" xmlns:p="http://schemas.openxmlformats.org/presentationml/2006/main">
+  <p:cSld>
+    <p:bg>
+      <p:bgPr>
+        <a:blipFill rotWithShape="1">
+          <a:blip r:embed="rId2">
+            <a:duotone>
+              <a:schemeClr val="bg2">
+                <a:shade val="69000"/>
+                <a:hueMod val="108000"/>
+                <a:satMod val="164000"/>
+                <a:lumMod val="74000"/>
+              </a:schemeClr>
+              <a:schemeClr val="bg2">
+                <a:tint val="96000"/>
+                <a:hueMod val="88000"/>
+                <a:satMod val="140000"/>
+                <a:lumMod val="132000"/>
+              </a:schemeClr>
+            </a:duotone>
+          </a:blip>
+          <a:stretch/>
+        </a:blipFill>
+        <a:effectLst/>
+      </p:bgPr>
+    </p:bg>
+    <p:spTree>
+      <p:nvGrpSpPr>
+        <p:cNvPr id="1" name=""/>
+        <p:cNvGrpSpPr/>
+        <p:nvPr/>
+      </p:nvGrpSpPr>
+      <p:grpSpPr>
+        <a:xfrm>
+          <a:off x="0" y="0"/>
+          <a:ext cx="0" cy="0"/>
+          <a:chOff x="0" y="0"/>
+          <a:chExt cx="0" cy="0"/>
+        </a:xfrm>
+      </p:grpSpPr>
+      <p:sp>
+        <p:nvSpPr>
+          <p:cNvPr id="8" name="Rectangle 7">
+            <a:extLst>
+              <a:ext uri="{FF2B5EF4-FFF2-40B4-BE49-F238E27FC236}">
+                <a16:creationId xmlns:a16="http://schemas.microsoft.com/office/drawing/2014/main" id="{2937D191-13D4-4D46-AA31-AA8157D36E28}"/>
+              </a:ext>
+              <a:ext uri="{C183D7F6-B498-43B3-948B-1728B52AA6E4}">
+                <adec:decorative xmlns:adec="http://schemas.microsoft.com/office/drawing/2017/decorative" val="1"/>
+              </a:ext>
+            </a:extLst>
+          </p:cNvPr>
+          <p:cNvSpPr>
+            <a:spLocks noGrp="1" noRot="1" noChangeAspect="1" noMove="1" noResize="1" noEditPoints="1" noAdjustHandles="1" noChangeArrowheads="1" noChangeShapeType="1" noTextEdit="1"/>
+          </p:cNvSpPr>
+          <p:nvPr>
+            <p:extLst>
+              <p:ext uri="{386F3935-93C4-4BCD-93E2-E3B085C9AB24}">
+                <p16:designElem xmlns:p16="http://schemas.microsoft.com/office/powerpoint/2015/main" val="1"/>
+              </p:ext>
+            </p:extLst>
+          </p:nvPr>
+        </p:nvSpPr>
+        <p:spPr>
+          <a:xfrm>
+            <a:off x="0" y="0"/>
+            <a:ext cx="12192000" cy="6858000"/>
+          </a:xfrm>
+          <a:prstGeom prst="rect">
+            <a:avLst/>
+          </a:prstGeom>
+          <a:solidFill>
+            <a:schemeClr val="bg1">
+              <a:lumMod val="75000"/>
+            </a:schemeClr>
+          </a:solidFill>
+          <a:ln>
+            <a:noFill/>
+          </a:ln>
+        </p:spPr>
+        <p:style>
+          <a:lnRef idx="2">
+            <a:schemeClr val="accent1">
+              <a:shade val="50000"/>
+            </a:schemeClr>
+          </a:lnRef>
+          <a:fillRef idx="1">
+            <a:schemeClr val="accent1"/>
+          </a:fillRef>
+          <a:effectRef idx="0">
+            <a:schemeClr val="accent1"/>
+          </a:effectRef>
+          <a:fontRef idx="minor">
+            <a:schemeClr val="lt1"/>
+          </a:fontRef>
+        </p:style>
+        <p:txBody>
+          <a:bodyPr rtlCol="0" anchor="ctr"/>
+          <a:lstStyle/>
+          <a:p>
+            <a:pPr algn="ctr"/>
+            <a:endParaRPr lang="en-US"/>
+          </a:p>
+        </p:txBody>
+      </p:sp>
+      <p:sp>
+        <p:nvSpPr>
+          <p:cNvPr id="10" name="Rectangle 9">
+            <a:extLst>
+              <a:ext uri="{FF2B5EF4-FFF2-40B4-BE49-F238E27FC236}">
+                <a16:creationId xmlns:a16="http://schemas.microsoft.com/office/drawing/2014/main" id="{1B796756-8CDE-44C7-BF60-022DF3B3A7B7}"/>
+              </a:ext>
+              <a:ext uri="{C183D7F6-B498-43B3-948B-1728B52AA6E4}">
+                <adec:decorative xmlns:adec="http://schemas.microsoft.com/office/drawing/2017/decorative" val="1"/>
+              </a:ext>
+            </a:extLst>
+          </p:cNvPr>
+          <p:cNvSpPr>
+            <a:spLocks noGrp="1" noRot="1" noChangeAspect="1" noMove="1" noResize="1" noEditPoints="1" noAdjustHandles="1" noChangeArrowheads="1" noChangeShapeType="1" noTextEdit="1"/>
+          </p:cNvSpPr>
+          <p:nvPr>
+            <p:extLst>
+              <p:ext uri="{386F3935-93C4-4BCD-93E2-E3B085C9AB24}">
+                <p16:designElem xmlns:p16="http://schemas.microsoft.com/office/powerpoint/2015/main" val="1"/>
+              </p:ext>
+            </p:extLst>
+          </p:nvPr>
+        </p:nvSpPr>
+        <p:spPr>
+          <a:xfrm>
+            <a:off x="643466" y="643468"/>
+            <a:ext cx="10905067" cy="5571066"/>
+          </a:xfrm>
+          <a:prstGeom prst="rect">
+            <a:avLst/>
+          </a:prstGeom>
+          <a:solidFill>
+            <a:srgbClr val="FFFFFF"/>
+          </a:solidFill>
+          <a:ln>
+            <a:noFill/>
+          </a:ln>
+        </p:spPr>
+        <p:style>
+          <a:lnRef idx="2">
+            <a:schemeClr val="accent1">
+              <a:shade val="50000"/>
+            </a:schemeClr>
+          </a:lnRef>
+          <a:fillRef idx="1">
+            <a:schemeClr val="accent1"/>
+          </a:fillRef>
+          <a:effectRef idx="0">
+            <a:schemeClr val="accent1"/>
+          </a:effectRef>
+          <a:fontRef idx="minor">
+            <a:schemeClr val="lt1"/>
+          </a:fontRef>
+        </p:style>
+        <p:txBody>
+          <a:bodyPr rtlCol="0" anchor="ctr"/>
+          <a:lstStyle/>
+          <a:p>
+            <a:pPr algn="ctr"/>
+            <a:endParaRPr lang="en-US"/>
+          </a:p>
+        </p:txBody>
+      </p:sp>
+      <p:sp>
+        <p:nvSpPr>
+          <p:cNvPr id="12" name="Rectangle 11">
+            <a:extLst>
+              <a:ext uri="{FF2B5EF4-FFF2-40B4-BE49-F238E27FC236}">
+                <a16:creationId xmlns:a16="http://schemas.microsoft.com/office/drawing/2014/main" id="{B502A146-6461-45FE-B52F-8F9B510D9E31}"/>
+              </a:ext>
+              <a:ext uri="{C183D7F6-B498-43B3-948B-1728B52AA6E4}">
+                <adec:decorative xmlns:adec="http://schemas.microsoft.com/office/drawing/2017/decorative" val="1"/>
+              </a:ext>
+            </a:extLst>
+          </p:cNvPr>
+          <p:cNvSpPr>
+            <a:spLocks noGrp="1" noRot="1" noChangeAspect="1" noMove="1" noResize="1" noEditPoints="1" noAdjustHandles="1" noChangeArrowheads="1" noChangeShapeType="1" noTextEdit="1"/>
+          </p:cNvSpPr>
+          <p:nvPr>
+            <p:extLst>
+              <p:ext uri="{386F3935-93C4-4BCD-93E2-E3B085C9AB24}">
+                <p16:designElem xmlns:p16="http://schemas.microsoft.com/office/powerpoint/2015/main" val="1"/>
+              </p:ext>
+            </p:extLst>
+          </p:nvPr>
+        </p:nvSpPr>
+        <p:spPr>
+          <a:xfrm>
+            <a:off x="477012" y="480060"/>
+            <a:ext cx="11237976" cy="5897880"/>
+          </a:xfrm>
+          <a:prstGeom prst="rect">
+            <a:avLst/>
+          </a:prstGeom>
+          <a:noFill/>
+          <a:ln>
+            <a:solidFill>
+              <a:srgbClr val="FFFFFF"/>
+            </a:solidFill>
+          </a:ln>
+        </p:spPr>
+        <p:style>
+          <a:lnRef idx="2">
+            <a:schemeClr val="accent1">
+              <a:shade val="50000"/>
+            </a:schemeClr>
+          </a:lnRef>
+          <a:fillRef idx="1">
+            <a:schemeClr val="accent1"/>
+          </a:fillRef>
+          <a:effectRef idx="0">
+            <a:schemeClr val="accent1"/>
+          </a:effectRef>
+          <a:fontRef idx="minor">
+            <a:schemeClr val="lt1"/>
+          </a:fontRef>
+        </p:style>
+        <p:txBody>
+          <a:bodyPr rtlCol="0" anchor="ctr"/>
+          <a:lstStyle/>
+          <a:p>
+            <a:pPr algn="ctr"/>
+            <a:endParaRPr lang="en-US"/>
+          </a:p>
+        </p:txBody>
+      </p:sp>
+      <p:pic>
+        <p:nvPicPr>
+          <p:cNvPr id="3" name="Picture 2">
+            <a:extLst>
+              <a:ext uri="{FF2B5EF4-FFF2-40B4-BE49-F238E27FC236}">
+                <a16:creationId xmlns:a16="http://schemas.microsoft.com/office/drawing/2014/main" id="{22CFCEAB-ABFC-8D66-7156-C4D4613FC086}"/>
+              </a:ext>
+            </a:extLst>
+          </p:cNvPr>
+          <p:cNvPicPr>
+            <a:picLocks noChangeAspect="1"/>
+          </p:cNvPicPr>
+          <p:nvPr/>
+        </p:nvPicPr>
+        <p:blipFill>
+          <a:blip r:embed="rId3">
+            <a:extLst>
+              <a:ext uri="{BEBA8EAE-BF5A-486C-A8C5-ECC9F3942E4B}">
+                <a14:imgProps xmlns:a14="http://schemas.microsoft.com/office/drawing/2010/main">
+                  <a14:imgLayer r:embed="rId4">
+                    <a14:imgEffect>
+                      <a14:backgroundRemoval t="5342" b="90598" l="10000" r="90000">
+                        <a14:foregroundMark x1="55429" y1="8761" x2="55429" y2="8761"/>
+                        <a14:foregroundMark x1="58762" y1="5342" x2="58762" y2="5342"/>
+                        <a14:foregroundMark x1="32952" y1="82372" x2="32952" y2="82372"/>
+                        <a14:foregroundMark x1="40762" y1="90598" x2="40762" y2="90598"/>
+                      </a14:backgroundRemoval>
+                    </a14:imgEffect>
+                  </a14:imgLayer>
+                </a14:imgProps>
+              </a:ext>
+            </a:extLst>
+          </a:blip>
+          <a:stretch>
+            <a:fillRect/>
+          </a:stretch>
+        </p:blipFill>
+        <p:spPr>
+          <a:xfrm>
+            <a:off x="3072504" y="1126600"/>
+            <a:ext cx="5159439" cy="4604800"/>
+          </a:xfrm>
+          <a:prstGeom prst="rect">
+            <a:avLst/>
+          </a:prstGeom>
+        </p:spPr>
+      </p:pic>
+      <p:sp>
+        <p:nvSpPr>
+          <p:cNvPr id="14" name="Rectangle 13">
+            <a:extLst>
+              <a:ext uri="{FF2B5EF4-FFF2-40B4-BE49-F238E27FC236}">
+                <a16:creationId xmlns:a16="http://schemas.microsoft.com/office/drawing/2014/main" id="{95A115E8-EE09-4F41-9329-56DEEE8ABE20}"/>
+              </a:ext>
+              <a:ext uri="{C183D7F6-B498-43B3-948B-1728B52AA6E4}">
+                <adec:decorative xmlns:adec="http://schemas.microsoft.com/office/drawing/2017/decorative" val="1"/>
+              </a:ext>
+            </a:extLst>
+          </p:cNvPr>
+          <p:cNvSpPr>
+            <a:spLocks noGrp="1" noRot="1" noChangeAspect="1" noMove="1" noResize="1" noEditPoints="1" noAdjustHandles="1" noChangeArrowheads="1" noChangeShapeType="1" noTextEdit="1"/>
+          </p:cNvSpPr>
+          <p:nvPr>
+            <p:extLst>
+              <p:ext uri="{386F3935-93C4-4BCD-93E2-E3B085C9AB24}">
+                <p16:designElem xmlns:p16="http://schemas.microsoft.com/office/powerpoint/2015/main" val="1"/>
+              </p:ext>
+            </p:extLst>
+          </p:nvPr>
+        </p:nvSpPr>
+        <p:spPr>
+          <a:xfrm>
+            <a:off x="10437812" y="0"/>
+            <a:ext cx="685800" cy="1143000"/>
+          </a:xfrm>
+          <a:prstGeom prst="rect">
+            <a:avLst/>
+          </a:prstGeom>
+          <a:solidFill>
+            <a:schemeClr val="accent1"/>
+          </a:solidFill>
+          <a:ln>
+            <a:noFill/>
+          </a:ln>
+        </p:spPr>
+        <p:style>
+          <a:lnRef idx="1">
+            <a:schemeClr val="accent1"/>
+          </a:lnRef>
+          <a:fillRef idx="3">
+            <a:schemeClr val="accent1"/>
+          </a:fillRef>
+          <a:effectRef idx="2">
+            <a:schemeClr val="accent1"/>
+          </a:effectRef>
+          <a:fontRef idx="minor">
+            <a:schemeClr val="lt1"/>
+          </a:fontRef>
+        </p:style>
+        <p:txBody>
+          <a:bodyPr/>
+          <a:lstStyle/>
+          <a:p>
+            <a:endParaRPr lang="en-US"/>
+          </a:p>
+        </p:txBody>
+      </p:sp>
+      <p:sp>
+        <p:nvSpPr>
+          <p:cNvPr id="4" name="Left Brace 3">
+            <a:extLst>
+              <a:ext uri="{FF2B5EF4-FFF2-40B4-BE49-F238E27FC236}">
+                <a16:creationId xmlns:a16="http://schemas.microsoft.com/office/drawing/2014/main" id="{CC0281F9-AE33-C54F-6371-5A8BA4F8BBE5}"/>
+              </a:ext>
+            </a:extLst>
+          </p:cNvPr>
+          <p:cNvSpPr/>
+          <p:nvPr/>
+        </p:nvSpPr>
+        <p:spPr>
+          <a:xfrm>
+            <a:off x="3634740" y="2007870"/>
+            <a:ext cx="266700" cy="2061210"/>
+          </a:xfrm>
+          <a:prstGeom prst="leftBrace">
+            <a:avLst/>
+          </a:prstGeom>
+        </p:spPr>
+        <p:style>
+          <a:lnRef idx="1">
+            <a:schemeClr val="dk1"/>
+          </a:lnRef>
+          <a:fillRef idx="0">
+            <a:schemeClr val="dk1"/>
+          </a:fillRef>
+          <a:effectRef idx="0">
+            <a:schemeClr val="dk1"/>
+          </a:effectRef>
+          <a:fontRef idx="minor">
+            <a:schemeClr val="tx1"/>
+          </a:fontRef>
+        </p:style>
+        <p:txBody>
+          <a:bodyPr rtlCol="0" anchor="ctr"/>
+          <a:lstStyle/>
+          <a:p>
+            <a:pPr algn="ctr"/>
+            <a:endParaRPr lang="en-US"/>
+          </a:p>
+        </p:txBody>
+      </p:sp>
+      <p:sp>
+        <p:nvSpPr>
+          <p:cNvPr id="6" name="Left Brace 5">
+            <a:extLst>
+              <a:ext uri="{FF2B5EF4-FFF2-40B4-BE49-F238E27FC236}">
+                <a16:creationId xmlns:a16="http://schemas.microsoft.com/office/drawing/2014/main" id="{77D1CEEF-E4DF-C033-6E35-437D4DB84C17}"/>
+              </a:ext>
+            </a:extLst>
+          </p:cNvPr>
+          <p:cNvSpPr/>
+          <p:nvPr/>
+        </p:nvSpPr>
+        <p:spPr>
+          <a:xfrm rot="18917699">
+            <a:off x="4243709" y="3954707"/>
+            <a:ext cx="348921" cy="1731241"/>
+          </a:xfrm>
+          <a:prstGeom prst="leftBrace">
+            <a:avLst/>
+          </a:prstGeom>
+        </p:spPr>
+        <p:style>
+          <a:lnRef idx="1">
+            <a:schemeClr val="dk1"/>
+          </a:lnRef>
+          <a:fillRef idx="0">
+            <a:schemeClr val="dk1"/>
+          </a:fillRef>
+          <a:effectRef idx="0">
+            <a:schemeClr val="dk1"/>
+          </a:effectRef>
+          <a:fontRef idx="minor">
+            <a:schemeClr val="tx1"/>
+          </a:fontRef>
+        </p:style>
+        <p:txBody>
+          <a:bodyPr rtlCol="0" anchor="ctr"/>
+          <a:lstStyle/>
+          <a:p>
+            <a:pPr algn="ctr"/>
+            <a:endParaRPr lang="en-US"/>
+          </a:p>
+        </p:txBody>
+      </p:sp>
+      <p:sp>
+        <p:nvSpPr>
+          <p:cNvPr id="13" name="Left Brace 12">
+            <a:extLst>
+              <a:ext uri="{FF2B5EF4-FFF2-40B4-BE49-F238E27FC236}">
+                <a16:creationId xmlns:a16="http://schemas.microsoft.com/office/drawing/2014/main" id="{555C0671-64F6-8017-0160-04A07EC42E40}"/>
+              </a:ext>
+            </a:extLst>
+          </p:cNvPr>
+          <p:cNvSpPr/>
+          <p:nvPr/>
+        </p:nvSpPr>
+        <p:spPr>
+          <a:xfrm rot="15111459">
+            <a:off x="6104704" y="3969511"/>
+            <a:ext cx="348921" cy="2265855"/>
+          </a:xfrm>
+          <a:prstGeom prst="leftBrace">
+            <a:avLst/>
+          </a:prstGeom>
+        </p:spPr>
+        <p:style>
+          <a:lnRef idx="1">
+            <a:schemeClr val="dk1"/>
+          </a:lnRef>
+          <a:fillRef idx="0">
+            <a:schemeClr val="dk1"/>
+          </a:fillRef>
+          <a:effectRef idx="0">
+            <a:schemeClr val="dk1"/>
+          </a:effectRef>
+          <a:fontRef idx="minor">
+            <a:schemeClr val="tx1"/>
+          </a:fontRef>
+        </p:style>
+        <p:txBody>
+          <a:bodyPr rtlCol="0" anchor="ctr"/>
+          <a:lstStyle/>
+          <a:p>
+            <a:pPr algn="ctr"/>
+            <a:endParaRPr lang="en-US"/>
+          </a:p>
+        </p:txBody>
+      </p:sp>
+      <p:cxnSp>
+        <p:nvCxnSpPr>
+          <p:cNvPr id="16" name="Connector: Curved 15">
+            <a:extLst>
+              <a:ext uri="{FF2B5EF4-FFF2-40B4-BE49-F238E27FC236}">
+                <a16:creationId xmlns:a16="http://schemas.microsoft.com/office/drawing/2014/main" id="{02529DFC-20CC-F07A-DB02-6A99A547BEE3}"/>
+              </a:ext>
+            </a:extLst>
+          </p:cNvPr>
+          <p:cNvCxnSpPr>
+            <a:cxnSpLocks/>
+          </p:cNvCxnSpPr>
+          <p:nvPr/>
+        </p:nvCxnSpPr>
+        <p:spPr>
+          <a:xfrm rot="5400000" flipH="1" flipV="1">
+            <a:off x="5562600" y="1644650"/>
+            <a:ext cx="1651000" cy="1562100"/>
+          </a:xfrm>
+          <a:prstGeom prst="curvedConnector3">
+            <a:avLst/>
+          </a:prstGeom>
+          <a:ln>
+            <a:tailEnd type="triangle"/>
+          </a:ln>
+        </p:spPr>
+        <p:style>
+          <a:lnRef idx="1">
+            <a:schemeClr val="dk1"/>
+          </a:lnRef>
+          <a:fillRef idx="0">
+            <a:schemeClr val="dk1"/>
+          </a:fillRef>
+          <a:effectRef idx="0">
+            <a:schemeClr val="dk1"/>
+          </a:effectRef>
+          <a:fontRef idx="minor">
+            <a:schemeClr val="tx1"/>
+          </a:fontRef>
+        </p:style>
+      </p:cxnSp>
+      <p:sp>
+        <p:nvSpPr>
+          <p:cNvPr id="19" name="TextBox 18">
+            <a:extLst>
+              <a:ext uri="{FF2B5EF4-FFF2-40B4-BE49-F238E27FC236}">
+                <a16:creationId xmlns:a16="http://schemas.microsoft.com/office/drawing/2014/main" id="{CCBA14ED-B918-C490-6FC0-67843D77AB5B}"/>
+              </a:ext>
+            </a:extLst>
+          </p:cNvPr>
+          <p:cNvSpPr txBox="1"/>
+          <p:nvPr/>
+        </p:nvSpPr>
+        <p:spPr>
+          <a:xfrm>
+            <a:off x="2892170" y="2907670"/>
+            <a:ext cx="831851" cy="261610"/>
+          </a:xfrm>
+          <a:prstGeom prst="rect">
+            <a:avLst/>
+          </a:prstGeom>
+          <a:noFill/>
+        </p:spPr>
+        <p:txBody>
+          <a:bodyPr wrap="square" rtlCol="0">
+            <a:spAutoFit/>
+          </a:bodyPr>
+          <a:lstStyle/>
+          <a:p>
+            <a:pPr algn="ctr"/>
+            <a:r>
+              <a:rPr lang="en-US" sz="1100" dirty="0">
+                <a:solidFill>
+                  <a:schemeClr val="bg1"/>
+                </a:solidFill>
+              </a:rPr>
+              <a:t>250mm</a:t>
+            </a:r>
+          </a:p>
+        </p:txBody>
+      </p:sp>
+      <p:sp>
+        <p:nvSpPr>
+          <p:cNvPr id="21" name="TextBox 20">
+            <a:extLst>
+              <a:ext uri="{FF2B5EF4-FFF2-40B4-BE49-F238E27FC236}">
+                <a16:creationId xmlns:a16="http://schemas.microsoft.com/office/drawing/2014/main" id="{39AE0237-E7C1-4247-ED49-15AE6D84F59E}"/>
+              </a:ext>
+            </a:extLst>
+          </p:cNvPr>
+          <p:cNvSpPr txBox="1"/>
+          <p:nvPr/>
+        </p:nvSpPr>
+        <p:spPr>
+          <a:xfrm>
+            <a:off x="3561987" y="4840828"/>
+            <a:ext cx="831851" cy="261610"/>
+          </a:xfrm>
+          <a:prstGeom prst="rect">
+            <a:avLst/>
+          </a:prstGeom>
+          <a:noFill/>
+        </p:spPr>
+        <p:txBody>
+          <a:bodyPr wrap="square" rtlCol="0">
+            <a:spAutoFit/>
+          </a:bodyPr>
+          <a:lstStyle/>
+          <a:p>
+            <a:pPr algn="ctr"/>
+            <a:r>
+              <a:rPr lang="en-US" sz="1100" dirty="0">
+                <a:solidFill>
+                  <a:schemeClr val="bg1"/>
+                </a:solidFill>
+              </a:rPr>
+              <a:t>250mm</a:t>
+            </a:r>
+          </a:p>
+        </p:txBody>
+      </p:sp>
+      <p:sp>
+        <p:nvSpPr>
+          <p:cNvPr id="23" name="TextBox 22">
+            <a:extLst>
+              <a:ext uri="{FF2B5EF4-FFF2-40B4-BE49-F238E27FC236}">
+                <a16:creationId xmlns:a16="http://schemas.microsoft.com/office/drawing/2014/main" id="{4B17BF37-57D3-74A6-969A-C0B868A90B66}"/>
+              </a:ext>
+            </a:extLst>
+          </p:cNvPr>
+          <p:cNvSpPr txBox="1"/>
+          <p:nvPr/>
+        </p:nvSpPr>
+        <p:spPr>
+          <a:xfrm>
+            <a:off x="5972174" y="5257800"/>
+            <a:ext cx="831851" cy="261610"/>
+          </a:xfrm>
+          <a:prstGeom prst="rect">
+            <a:avLst/>
+          </a:prstGeom>
+          <a:noFill/>
+        </p:spPr>
+        <p:txBody>
+          <a:bodyPr wrap="square" rtlCol="0">
+            <a:spAutoFit/>
+          </a:bodyPr>
+          <a:lstStyle/>
+          <a:p>
+            <a:pPr algn="ctr"/>
+            <a:r>
+              <a:rPr lang="en-US" sz="1100" dirty="0">
+                <a:solidFill>
+                  <a:schemeClr val="bg1"/>
+                </a:solidFill>
+              </a:rPr>
+              <a:t>250mm</a:t>
+            </a:r>
+          </a:p>
+        </p:txBody>
+      </p:sp>
+      <p:sp>
+        <p:nvSpPr>
+          <p:cNvPr id="25" name="TextBox 24">
+            <a:extLst>
+              <a:ext uri="{FF2B5EF4-FFF2-40B4-BE49-F238E27FC236}">
+                <a16:creationId xmlns:a16="http://schemas.microsoft.com/office/drawing/2014/main" id="{5D1DAB4E-913E-4468-8737-25AA69951F3C}"/>
+              </a:ext>
+            </a:extLst>
+          </p:cNvPr>
+          <p:cNvSpPr txBox="1"/>
+          <p:nvPr/>
+        </p:nvSpPr>
+        <p:spPr>
+          <a:xfrm>
+            <a:off x="6814311" y="1387691"/>
+            <a:ext cx="831851" cy="261610"/>
+          </a:xfrm>
+          <a:prstGeom prst="rect">
+            <a:avLst/>
+          </a:prstGeom>
+          <a:noFill/>
+        </p:spPr>
+        <p:txBody>
+          <a:bodyPr wrap="square" rtlCol="0">
+            <a:spAutoFit/>
+          </a:bodyPr>
+          <a:lstStyle/>
+          <a:p>
+            <a:pPr algn="ctr"/>
+            <a:r>
+              <a:rPr lang="en-US" sz="1100" dirty="0">
+                <a:solidFill>
+                  <a:schemeClr val="bg1"/>
+                </a:solidFill>
+              </a:rPr>
+              <a:t>Source</a:t>
+            </a:r>
+          </a:p>
+        </p:txBody>
+      </p:sp>
+    </p:spTree>
+    <p:extLst>
+      <p:ext uri="{BB962C8B-B14F-4D97-AF65-F5344CB8AC3E}">
+        <p14:creationId xmlns:p14="http://schemas.microsoft.com/office/powerpoint/2010/main" val="2594440445"/>
+      </p:ext>
+    </p:extLst>
+  </p:cSld>
+  <p:clrMapOvr>
+    <a:masterClrMapping/>
+  </p:clrMapOvr>
+</p:sld>
+</file>
+
+<file path=ppt/slides/slide18.xml><?xml version="1.0" encoding="utf-8"?>
+<p:sld xmlns:a="http://schemas.openxmlformats.org/drawingml/2006/main" xmlns:r="http://schemas.openxmlformats.org/officeDocument/2006/relationships" xmlns:p="http://schemas.openxmlformats.org/presentationml/2006/main">
+  <p:cSld>
+    <p:bg>
+      <p:bgPr>
+        <a:blipFill rotWithShape="1">
+          <a:blip r:embed="rId2">
+            <a:duotone>
+              <a:schemeClr val="bg2">
+                <a:shade val="69000"/>
+                <a:hueMod val="108000"/>
+                <a:satMod val="164000"/>
+                <a:lumMod val="74000"/>
+              </a:schemeClr>
+              <a:schemeClr val="bg2">
+                <a:tint val="96000"/>
+                <a:hueMod val="88000"/>
+                <a:satMod val="140000"/>
+                <a:lumMod val="132000"/>
+              </a:schemeClr>
+            </a:duotone>
+          </a:blip>
+          <a:stretch/>
+        </a:blipFill>
+        <a:effectLst/>
+      </p:bgPr>
+    </p:bg>
+    <p:spTree>
+      <p:nvGrpSpPr>
+        <p:cNvPr id="1" name=""/>
+        <p:cNvGrpSpPr/>
+        <p:nvPr/>
+      </p:nvGrpSpPr>
+      <p:grpSpPr>
+        <a:xfrm>
+          <a:off x="0" y="0"/>
+          <a:ext cx="0" cy="0"/>
+          <a:chOff x="0" y="0"/>
+          <a:chExt cx="0" cy="0"/>
+        </a:xfrm>
+      </p:grpSpPr>
+      <p:sp>
+        <p:nvSpPr>
+          <p:cNvPr id="8" name="Rectangle 7">
+            <a:extLst>
+              <a:ext uri="{FF2B5EF4-FFF2-40B4-BE49-F238E27FC236}">
+                <a16:creationId xmlns:a16="http://schemas.microsoft.com/office/drawing/2014/main" id="{2937D191-13D4-4D46-AA31-AA8157D36E28}"/>
+              </a:ext>
+              <a:ext uri="{C183D7F6-B498-43B3-948B-1728B52AA6E4}">
+                <adec:decorative xmlns:adec="http://schemas.microsoft.com/office/drawing/2017/decorative" val="1"/>
+              </a:ext>
+            </a:extLst>
+          </p:cNvPr>
+          <p:cNvSpPr>
+            <a:spLocks noGrp="1" noRot="1" noChangeAspect="1" noMove="1" noResize="1" noEditPoints="1" noAdjustHandles="1" noChangeArrowheads="1" noChangeShapeType="1" noTextEdit="1"/>
+          </p:cNvSpPr>
+          <p:nvPr>
+            <p:extLst>
+              <p:ext uri="{386F3935-93C4-4BCD-93E2-E3B085C9AB24}">
+                <p16:designElem xmlns:p16="http://schemas.microsoft.com/office/powerpoint/2015/main" val="1"/>
+              </p:ext>
+            </p:extLst>
+          </p:nvPr>
+        </p:nvSpPr>
+        <p:spPr>
+          <a:xfrm>
+            <a:off x="0" y="0"/>
+            <a:ext cx="12192000" cy="6858000"/>
+          </a:xfrm>
+          <a:prstGeom prst="rect">
+            <a:avLst/>
+          </a:prstGeom>
+          <a:solidFill>
+            <a:schemeClr val="bg1">
+              <a:lumMod val="75000"/>
+            </a:schemeClr>
+          </a:solidFill>
+          <a:ln>
+            <a:noFill/>
+          </a:ln>
+        </p:spPr>
+        <p:style>
+          <a:lnRef idx="2">
+            <a:schemeClr val="accent1">
+              <a:shade val="50000"/>
+            </a:schemeClr>
+          </a:lnRef>
+          <a:fillRef idx="1">
+            <a:schemeClr val="accent1"/>
+          </a:fillRef>
+          <a:effectRef idx="0">
+            <a:schemeClr val="accent1"/>
+          </a:effectRef>
+          <a:fontRef idx="minor">
+            <a:schemeClr val="lt1"/>
+          </a:fontRef>
+        </p:style>
+        <p:txBody>
+          <a:bodyPr rtlCol="0" anchor="ctr"/>
+          <a:lstStyle/>
+          <a:p>
+            <a:pPr algn="ctr"/>
+            <a:endParaRPr lang="en-US"/>
+          </a:p>
+        </p:txBody>
+      </p:sp>
+      <p:sp>
+        <p:nvSpPr>
+          <p:cNvPr id="10" name="Rectangle 9">
+            <a:extLst>
+              <a:ext uri="{FF2B5EF4-FFF2-40B4-BE49-F238E27FC236}">
+                <a16:creationId xmlns:a16="http://schemas.microsoft.com/office/drawing/2014/main" id="{1B796756-8CDE-44C7-BF60-022DF3B3A7B7}"/>
+              </a:ext>
+              <a:ext uri="{C183D7F6-B498-43B3-948B-1728B52AA6E4}">
+                <adec:decorative xmlns:adec="http://schemas.microsoft.com/office/drawing/2017/decorative" val="1"/>
+              </a:ext>
+            </a:extLst>
+          </p:cNvPr>
+          <p:cNvSpPr>
+            <a:spLocks noGrp="1" noRot="1" noChangeAspect="1" noMove="1" noResize="1" noEditPoints="1" noAdjustHandles="1" noChangeArrowheads="1" noChangeShapeType="1" noTextEdit="1"/>
+          </p:cNvSpPr>
+          <p:nvPr>
+            <p:extLst>
+              <p:ext uri="{386F3935-93C4-4BCD-93E2-E3B085C9AB24}">
+                <p16:designElem xmlns:p16="http://schemas.microsoft.com/office/powerpoint/2015/main" val="1"/>
+              </p:ext>
+            </p:extLst>
+          </p:nvPr>
+        </p:nvSpPr>
+        <p:spPr>
+          <a:xfrm>
+            <a:off x="643466" y="643468"/>
+            <a:ext cx="10905067" cy="5571066"/>
+          </a:xfrm>
+          <a:prstGeom prst="rect">
+            <a:avLst/>
+          </a:prstGeom>
+          <a:solidFill>
+            <a:srgbClr val="FFFFFF"/>
+          </a:solidFill>
+          <a:ln>
+            <a:noFill/>
+          </a:ln>
+        </p:spPr>
+        <p:style>
+          <a:lnRef idx="2">
+            <a:schemeClr val="accent1">
+              <a:shade val="50000"/>
+            </a:schemeClr>
+          </a:lnRef>
+          <a:fillRef idx="1">
+            <a:schemeClr val="accent1"/>
+          </a:fillRef>
+          <a:effectRef idx="0">
+            <a:schemeClr val="accent1"/>
+          </a:effectRef>
+          <a:fontRef idx="minor">
+            <a:schemeClr val="lt1"/>
+          </a:fontRef>
+        </p:style>
+        <p:txBody>
+          <a:bodyPr rtlCol="0" anchor="ctr"/>
+          <a:lstStyle/>
+          <a:p>
+            <a:pPr algn="ctr"/>
+            <a:endParaRPr lang="en-US"/>
+          </a:p>
+        </p:txBody>
+      </p:sp>
+      <p:sp>
+        <p:nvSpPr>
+          <p:cNvPr id="12" name="Rectangle 11">
+            <a:extLst>
+              <a:ext uri="{FF2B5EF4-FFF2-40B4-BE49-F238E27FC236}">
+                <a16:creationId xmlns:a16="http://schemas.microsoft.com/office/drawing/2014/main" id="{B502A146-6461-45FE-B52F-8F9B510D9E31}"/>
+              </a:ext>
+              <a:ext uri="{C183D7F6-B498-43B3-948B-1728B52AA6E4}">
+                <adec:decorative xmlns:adec="http://schemas.microsoft.com/office/drawing/2017/decorative" val="1"/>
+              </a:ext>
+            </a:extLst>
+          </p:cNvPr>
+          <p:cNvSpPr>
+            <a:spLocks noGrp="1" noRot="1" noChangeAspect="1" noMove="1" noResize="1" noEditPoints="1" noAdjustHandles="1" noChangeArrowheads="1" noChangeShapeType="1" noTextEdit="1"/>
+          </p:cNvSpPr>
+          <p:nvPr>
+            <p:extLst>
+              <p:ext uri="{386F3935-93C4-4BCD-93E2-E3B085C9AB24}">
+                <p16:designElem xmlns:p16="http://schemas.microsoft.com/office/powerpoint/2015/main" val="1"/>
+              </p:ext>
+            </p:extLst>
+          </p:nvPr>
+        </p:nvSpPr>
+        <p:spPr>
+          <a:xfrm>
+            <a:off x="477012" y="480060"/>
+            <a:ext cx="11237976" cy="5897880"/>
+          </a:xfrm>
+          <a:prstGeom prst="rect">
+            <a:avLst/>
+          </a:prstGeom>
+          <a:noFill/>
+          <a:ln>
+            <a:solidFill>
+              <a:srgbClr val="FFFFFF"/>
+            </a:solidFill>
+          </a:ln>
+        </p:spPr>
+        <p:style>
+          <a:lnRef idx="2">
+            <a:schemeClr val="accent1">
+              <a:shade val="50000"/>
+            </a:schemeClr>
+          </a:lnRef>
+          <a:fillRef idx="1">
+            <a:schemeClr val="accent1"/>
+          </a:fillRef>
+          <a:effectRef idx="0">
+            <a:schemeClr val="accent1"/>
+          </a:effectRef>
+          <a:fontRef idx="minor">
+            <a:schemeClr val="lt1"/>
+          </a:fontRef>
+        </p:style>
+        <p:txBody>
+          <a:bodyPr rtlCol="0" anchor="ctr"/>
+          <a:lstStyle/>
+          <a:p>
+            <a:pPr algn="ctr"/>
+            <a:endParaRPr lang="en-US"/>
+          </a:p>
+        </p:txBody>
+      </p:sp>
+      <p:pic>
+        <p:nvPicPr>
+          <p:cNvPr id="3" name="Picture 2">
+            <a:extLst>
+              <a:ext uri="{FF2B5EF4-FFF2-40B4-BE49-F238E27FC236}">
+                <a16:creationId xmlns:a16="http://schemas.microsoft.com/office/drawing/2014/main" id="{D8587B9A-4547-6171-10C9-2D4D6D6338EA}"/>
+              </a:ext>
+            </a:extLst>
+          </p:cNvPr>
+          <p:cNvPicPr>
+            <a:picLocks noChangeAspect="1"/>
+          </p:cNvPicPr>
+          <p:nvPr/>
+        </p:nvPicPr>
+        <p:blipFill>
+          <a:blip r:embed="rId3"/>
+          <a:srcRect/>
+          <a:stretch>
+            <a:fillRect/>
+          </a:stretch>
+        </p:blipFill>
+        <p:spPr>
+          <a:xfrm>
+            <a:off x="2647828" y="1143000"/>
+            <a:ext cx="7084308" cy="4602214"/>
+          </a:xfrm>
+          <a:prstGeom prst="rect">
+            <a:avLst/>
+          </a:prstGeom>
+        </p:spPr>
+      </p:pic>
+      <p:sp>
+        <p:nvSpPr>
+          <p:cNvPr id="14" name="Rectangle 13">
+            <a:extLst>
+              <a:ext uri="{FF2B5EF4-FFF2-40B4-BE49-F238E27FC236}">
+                <a16:creationId xmlns:a16="http://schemas.microsoft.com/office/drawing/2014/main" id="{95A115E8-EE09-4F41-9329-56DEEE8ABE20}"/>
+              </a:ext>
+              <a:ext uri="{C183D7F6-B498-43B3-948B-1728B52AA6E4}">
+                <adec:decorative xmlns:adec="http://schemas.microsoft.com/office/drawing/2017/decorative" val="1"/>
+              </a:ext>
+            </a:extLst>
+          </p:cNvPr>
+          <p:cNvSpPr>
+            <a:spLocks noGrp="1" noRot="1" noChangeAspect="1" noMove="1" noResize="1" noEditPoints="1" noAdjustHandles="1" noChangeArrowheads="1" noChangeShapeType="1" noTextEdit="1"/>
+          </p:cNvSpPr>
+          <p:nvPr>
+            <p:extLst>
+              <p:ext uri="{386F3935-93C4-4BCD-93E2-E3B085C9AB24}">
+                <p16:designElem xmlns:p16="http://schemas.microsoft.com/office/powerpoint/2015/main" val="1"/>
+              </p:ext>
+            </p:extLst>
+          </p:nvPr>
+        </p:nvSpPr>
+        <p:spPr>
+          <a:xfrm>
+            <a:off x="10437812" y="0"/>
+            <a:ext cx="685800" cy="1143000"/>
+          </a:xfrm>
+          <a:prstGeom prst="rect">
+            <a:avLst/>
+          </a:prstGeom>
+          <a:solidFill>
+            <a:schemeClr val="accent1"/>
+          </a:solidFill>
+          <a:ln>
+            <a:noFill/>
+          </a:ln>
+        </p:spPr>
+        <p:style>
+          <a:lnRef idx="1">
+            <a:schemeClr val="accent1"/>
+          </a:lnRef>
+          <a:fillRef idx="3">
+            <a:schemeClr val="accent1"/>
+          </a:fillRef>
+          <a:effectRef idx="2">
+            <a:schemeClr val="accent1"/>
+          </a:effectRef>
+          <a:fontRef idx="minor">
+            <a:schemeClr val="lt1"/>
+          </a:fontRef>
+        </p:style>
+        <p:txBody>
+          <a:bodyPr/>
+          <a:lstStyle/>
+          <a:p>
+            <a:endParaRPr lang="en-US"/>
+          </a:p>
+        </p:txBody>
+      </p:sp>
+      <p:sp>
+        <p:nvSpPr>
+          <p:cNvPr id="5" name="Left Brace 4">
+            <a:extLst>
+              <a:ext uri="{FF2B5EF4-FFF2-40B4-BE49-F238E27FC236}">
+                <a16:creationId xmlns:a16="http://schemas.microsoft.com/office/drawing/2014/main" id="{91182A7D-3A1B-CA10-457B-75A904ECC71D}"/>
+              </a:ext>
+            </a:extLst>
+          </p:cNvPr>
+          <p:cNvSpPr/>
+          <p:nvPr/>
+        </p:nvSpPr>
+        <p:spPr>
+          <a:xfrm>
+            <a:off x="2879090" y="2413502"/>
+            <a:ext cx="232410" cy="2380748"/>
+          </a:xfrm>
+          <a:prstGeom prst="leftBrace">
+            <a:avLst/>
+          </a:prstGeom>
+        </p:spPr>
+        <p:style>
+          <a:lnRef idx="1">
+            <a:schemeClr val="dk1"/>
+          </a:lnRef>
+          <a:fillRef idx="0">
+            <a:schemeClr val="dk1"/>
+          </a:fillRef>
+          <a:effectRef idx="0">
+            <a:schemeClr val="dk1"/>
+          </a:effectRef>
+          <a:fontRef idx="minor">
+            <a:schemeClr val="tx1"/>
+          </a:fontRef>
+        </p:style>
+        <p:txBody>
+          <a:bodyPr rtlCol="0" anchor="ctr"/>
+          <a:lstStyle/>
+          <a:p>
+            <a:pPr algn="ctr"/>
+            <a:endParaRPr lang="en-US"/>
+          </a:p>
+        </p:txBody>
+      </p:sp>
+      <p:sp>
+        <p:nvSpPr>
+          <p:cNvPr id="7" name="TextBox 6">
+            <a:extLst>
+              <a:ext uri="{FF2B5EF4-FFF2-40B4-BE49-F238E27FC236}">
+                <a16:creationId xmlns:a16="http://schemas.microsoft.com/office/drawing/2014/main" id="{7936EFB9-9A34-AD74-917E-A7738C6D91C6}"/>
+              </a:ext>
+            </a:extLst>
+          </p:cNvPr>
+          <p:cNvSpPr txBox="1"/>
+          <p:nvPr/>
+        </p:nvSpPr>
+        <p:spPr>
+          <a:xfrm>
+            <a:off x="2102230" y="3444107"/>
+            <a:ext cx="831851" cy="430887"/>
+          </a:xfrm>
+          <a:prstGeom prst="rect">
+            <a:avLst/>
+          </a:prstGeom>
+          <a:noFill/>
+        </p:spPr>
+        <p:txBody>
+          <a:bodyPr wrap="square" rtlCol="0">
+            <a:spAutoFit/>
+          </a:bodyPr>
+          <a:lstStyle/>
+          <a:p>
+            <a:pPr algn="ctr"/>
+            <a:r>
+              <a:rPr lang="en-US" sz="1100" dirty="0">
+                <a:solidFill>
+                  <a:schemeClr val="bg1"/>
+                </a:solidFill>
+              </a:rPr>
+              <a:t>Variable </a:t>
+            </a:r>
+            <a:r>
+              <a:rPr lang="en-US" sz="1100" dirty="0" err="1">
+                <a:solidFill>
+                  <a:schemeClr val="bg1"/>
+                </a:solidFill>
+              </a:rPr>
+              <a:t>lenght</a:t>
+            </a:r>
+            <a:endParaRPr lang="en-US" sz="1100" dirty="0">
+              <a:solidFill>
+                <a:schemeClr val="bg1"/>
+              </a:solidFill>
+            </a:endParaRPr>
+          </a:p>
+        </p:txBody>
+      </p:sp>
+      <p:sp>
+        <p:nvSpPr>
+          <p:cNvPr id="11" name="Left Brace 10">
+            <a:extLst>
+              <a:ext uri="{FF2B5EF4-FFF2-40B4-BE49-F238E27FC236}">
+                <a16:creationId xmlns:a16="http://schemas.microsoft.com/office/drawing/2014/main" id="{EE78F493-D7DA-AC7E-FB1D-92CFD2CD4D89}"/>
+              </a:ext>
+            </a:extLst>
+          </p:cNvPr>
+          <p:cNvSpPr/>
+          <p:nvPr/>
+        </p:nvSpPr>
+        <p:spPr>
+          <a:xfrm rot="18070434">
+            <a:off x="3674177" y="4487545"/>
+            <a:ext cx="327829" cy="1723597"/>
+          </a:xfrm>
+          <a:prstGeom prst="leftBrace">
+            <a:avLst/>
+          </a:prstGeom>
+        </p:spPr>
+        <p:style>
+          <a:lnRef idx="1">
+            <a:schemeClr val="dk1"/>
+          </a:lnRef>
+          <a:fillRef idx="0">
+            <a:schemeClr val="dk1"/>
+          </a:fillRef>
+          <a:effectRef idx="0">
+            <a:schemeClr val="dk1"/>
+          </a:effectRef>
+          <a:fontRef idx="minor">
+            <a:schemeClr val="tx1"/>
+          </a:fontRef>
+        </p:style>
+        <p:txBody>
+          <a:bodyPr rtlCol="0" anchor="ctr"/>
+          <a:lstStyle/>
+          <a:p>
+            <a:pPr algn="ctr"/>
+            <a:endParaRPr lang="en-US"/>
+          </a:p>
+        </p:txBody>
+      </p:sp>
+      <p:sp>
+        <p:nvSpPr>
+          <p:cNvPr id="15" name="TextBox 14">
+            <a:extLst>
+              <a:ext uri="{FF2B5EF4-FFF2-40B4-BE49-F238E27FC236}">
+                <a16:creationId xmlns:a16="http://schemas.microsoft.com/office/drawing/2014/main" id="{EF317805-2428-4D7D-B131-A8EDFE352F9B}"/>
+              </a:ext>
+            </a:extLst>
+          </p:cNvPr>
+          <p:cNvSpPr txBox="1"/>
+          <p:nvPr/>
+        </p:nvSpPr>
+        <p:spPr>
+          <a:xfrm>
+            <a:off x="3189303" y="5483604"/>
+            <a:ext cx="831851" cy="261610"/>
+          </a:xfrm>
+          <a:prstGeom prst="rect">
+            <a:avLst/>
+          </a:prstGeom>
+          <a:noFill/>
+        </p:spPr>
+        <p:txBody>
+          <a:bodyPr wrap="square" rtlCol="0">
+            <a:spAutoFit/>
+          </a:bodyPr>
+          <a:lstStyle/>
+          <a:p>
+            <a:pPr algn="ctr"/>
+            <a:r>
+              <a:rPr lang="en-US" sz="1100" dirty="0">
+                <a:solidFill>
+                  <a:schemeClr val="bg1"/>
+                </a:solidFill>
+              </a:rPr>
+              <a:t>30mm</a:t>
+            </a:r>
+          </a:p>
+        </p:txBody>
+      </p:sp>
+      <p:sp>
+        <p:nvSpPr>
+          <p:cNvPr id="17" name="Left Brace 16">
+            <a:extLst>
+              <a:ext uri="{FF2B5EF4-FFF2-40B4-BE49-F238E27FC236}">
+                <a16:creationId xmlns:a16="http://schemas.microsoft.com/office/drawing/2014/main" id="{817FC13F-B617-6FC9-0C13-F8CCA7F4BD28}"/>
+              </a:ext>
+            </a:extLst>
+          </p:cNvPr>
+          <p:cNvSpPr/>
+          <p:nvPr/>
+        </p:nvSpPr>
+        <p:spPr>
+          <a:xfrm rot="15289893">
+            <a:off x="6761718" y="2906870"/>
+            <a:ext cx="327829" cy="4605342"/>
+          </a:xfrm>
+          <a:prstGeom prst="leftBrace">
+            <a:avLst/>
+          </a:prstGeom>
+        </p:spPr>
+        <p:style>
+          <a:lnRef idx="1">
+            <a:schemeClr val="dk1"/>
+          </a:lnRef>
+          <a:fillRef idx="0">
+            <a:schemeClr val="dk1"/>
+          </a:fillRef>
+          <a:effectRef idx="0">
+            <a:schemeClr val="dk1"/>
+          </a:effectRef>
+          <a:fontRef idx="minor">
+            <a:schemeClr val="tx1"/>
+          </a:fontRef>
+        </p:style>
+        <p:txBody>
+          <a:bodyPr rtlCol="0" anchor="ctr"/>
+          <a:lstStyle/>
+          <a:p>
+            <a:pPr algn="ctr"/>
+            <a:endParaRPr lang="en-US"/>
+          </a:p>
+        </p:txBody>
+      </p:sp>
+      <p:sp>
+        <p:nvSpPr>
+          <p:cNvPr id="19" name="TextBox 18">
+            <a:extLst>
+              <a:ext uri="{FF2B5EF4-FFF2-40B4-BE49-F238E27FC236}">
+                <a16:creationId xmlns:a16="http://schemas.microsoft.com/office/drawing/2014/main" id="{E34C019C-78AB-3A17-A8D5-7EC2A0A22964}"/>
+              </a:ext>
+            </a:extLst>
+          </p:cNvPr>
+          <p:cNvSpPr txBox="1"/>
+          <p:nvPr/>
+        </p:nvSpPr>
+        <p:spPr>
+          <a:xfrm>
+            <a:off x="6616791" y="5385881"/>
+            <a:ext cx="831851" cy="261610"/>
+          </a:xfrm>
+          <a:prstGeom prst="rect">
+            <a:avLst/>
+          </a:prstGeom>
+          <a:noFill/>
+        </p:spPr>
+        <p:txBody>
+          <a:bodyPr wrap="square" rtlCol="0">
+            <a:spAutoFit/>
+          </a:bodyPr>
+          <a:lstStyle/>
+          <a:p>
+            <a:pPr algn="ctr"/>
+            <a:r>
+              <a:rPr lang="en-US" sz="1100" dirty="0">
+                <a:solidFill>
+                  <a:schemeClr val="bg1"/>
+                </a:solidFill>
+              </a:rPr>
+              <a:t>100mm</a:t>
+            </a:r>
+          </a:p>
+        </p:txBody>
+      </p:sp>
+      <p:cxnSp>
+        <p:nvCxnSpPr>
+          <p:cNvPr id="21" name="Connector: Curved 20">
+            <a:extLst>
+              <a:ext uri="{FF2B5EF4-FFF2-40B4-BE49-F238E27FC236}">
+                <a16:creationId xmlns:a16="http://schemas.microsoft.com/office/drawing/2014/main" id="{FE673AFA-A224-ECC8-2CCD-81465970948C}"/>
+              </a:ext>
+            </a:extLst>
+          </p:cNvPr>
+          <p:cNvCxnSpPr>
+            <a:cxnSpLocks/>
+          </p:cNvCxnSpPr>
+          <p:nvPr/>
+        </p:nvCxnSpPr>
+        <p:spPr>
+          <a:xfrm rot="5400000" flipH="1" flipV="1">
+            <a:off x="3712377" y="1686727"/>
+            <a:ext cx="1377950" cy="760396"/>
+          </a:xfrm>
+          <a:prstGeom prst="curvedConnector3">
+            <a:avLst>
+              <a:gd name="adj1" fmla="val 50000"/>
+            </a:avLst>
+          </a:prstGeom>
+          <a:ln>
+            <a:tailEnd type="triangle"/>
+          </a:ln>
+        </p:spPr>
+        <p:style>
+          <a:lnRef idx="1">
+            <a:schemeClr val="accent1"/>
+          </a:lnRef>
+          <a:fillRef idx="0">
+            <a:schemeClr val="accent1"/>
+          </a:fillRef>
+          <a:effectRef idx="0">
+            <a:schemeClr val="accent1"/>
+          </a:effectRef>
+          <a:fontRef idx="minor">
+            <a:schemeClr val="tx1"/>
+          </a:fontRef>
+        </p:style>
+      </p:cxnSp>
+      <mc:AlternateContent xmlns:mc="http://schemas.openxmlformats.org/markup-compatibility/2006">
+        <mc:Choice xmlns:a14="http://schemas.microsoft.com/office/drawing/2010/main" Requires="a14">
+          <p:sp>
+            <p:nvSpPr>
+              <p:cNvPr id="27" name="TextBox 26">
+                <a:extLst>
+                  <a:ext uri="{FF2B5EF4-FFF2-40B4-BE49-F238E27FC236}">
+                    <a16:creationId xmlns:a16="http://schemas.microsoft.com/office/drawing/2014/main" id="{9032AF19-96BE-F49F-C8A1-164A4CBAF944}"/>
+                  </a:ext>
+                </a:extLst>
+              </p:cNvPr>
+              <p:cNvSpPr txBox="1"/>
+              <p:nvPr/>
+            </p:nvSpPr>
+            <p:spPr>
+              <a:xfrm>
+                <a:off x="3908391" y="927556"/>
+                <a:ext cx="1928985" cy="445378"/>
+              </a:xfrm>
+              <a:prstGeom prst="rect">
+                <a:avLst/>
+              </a:prstGeom>
+              <a:noFill/>
+            </p:spPr>
+            <p:txBody>
+              <a:bodyPr wrap="square" rtlCol="0">
+                <a:spAutoFit/>
+              </a:bodyPr>
+              <a:lstStyle/>
+              <a:p>
+                <a:pPr algn="ctr"/>
+                <a:r>
+                  <a:rPr lang="en-US" sz="1100" dirty="0">
+                    <a:solidFill>
+                      <a:schemeClr val="bg1"/>
+                    </a:solidFill>
+                  </a:rPr>
+                  <a:t>Each square serves as a </a:t>
+                </a:r>
+                <a14:m>
+                  <m:oMath xmlns:m="http://schemas.openxmlformats.org/officeDocument/2006/math">
+                    <m:r>
+                      <a:rPr lang="en-US" sz="1100" b="0" i="1" smtClean="0">
+                        <a:solidFill>
+                          <a:schemeClr val="bg1"/>
+                        </a:solidFill>
+                        <a:latin typeface="Cambria Math" panose="02040503050406030204" pitchFamily="18" charset="0"/>
+                      </a:rPr>
+                      <m:t>1</m:t>
+                    </m:r>
+                    <m:sSup>
+                      <m:sSupPr>
+                        <m:ctrlPr>
+                          <a:rPr lang="en-US" sz="1100" b="0" i="1" smtClean="0">
+                            <a:solidFill>
+                              <a:schemeClr val="bg1"/>
+                            </a:solidFill>
+                            <a:latin typeface="Cambria Math" panose="02040503050406030204" pitchFamily="18" charset="0"/>
+                          </a:rPr>
+                        </m:ctrlPr>
+                      </m:sSupPr>
+                      <m:e>
+                        <m:r>
+                          <a:rPr lang="en-US" sz="1100" b="0" i="1" smtClean="0">
+                            <a:solidFill>
+                              <a:schemeClr val="bg1"/>
+                            </a:solidFill>
+                            <a:latin typeface="Cambria Math" panose="02040503050406030204" pitchFamily="18" charset="0"/>
+                          </a:rPr>
+                          <m:t>𝑚𝑚</m:t>
+                        </m:r>
+                      </m:e>
+                      <m:sup>
+                        <m:r>
+                          <a:rPr lang="en-US" sz="1100" b="0" i="1" smtClean="0">
+                            <a:solidFill>
+                              <a:schemeClr val="bg1"/>
+                            </a:solidFill>
+                            <a:latin typeface="Cambria Math" panose="02040503050406030204" pitchFamily="18" charset="0"/>
+                          </a:rPr>
+                          <m:t>2</m:t>
+                        </m:r>
+                      </m:sup>
+                    </m:sSup>
+                  </m:oMath>
+                </a14:m>
+                <a:r>
+                  <a:rPr lang="en-US" sz="1100" dirty="0">
+                    <a:solidFill>
+                      <a:schemeClr val="bg1"/>
+                    </a:solidFill>
+                  </a:rPr>
+                  <a:t> detector</a:t>
+                </a:r>
+              </a:p>
+            </p:txBody>
+          </p:sp>
+        </mc:Choice>
+        <mc:Fallback>
+          <p:sp>
+            <p:nvSpPr>
+              <p:cNvPr id="27" name="TextBox 26">
+                <a:extLst>
+                  <a:ext uri="{FF2B5EF4-FFF2-40B4-BE49-F238E27FC236}">
+                    <a16:creationId xmlns:a16="http://schemas.microsoft.com/office/drawing/2014/main" id="{9032AF19-96BE-F49F-C8A1-164A4CBAF944}"/>
+                  </a:ext>
+                </a:extLst>
+              </p:cNvPr>
+              <p:cNvSpPr txBox="1">
+                <a:spLocks noRot="1" noChangeAspect="1" noMove="1" noResize="1" noEditPoints="1" noAdjustHandles="1" noChangeArrowheads="1" noChangeShapeType="1" noTextEdit="1"/>
+              </p:cNvSpPr>
+              <p:nvPr/>
+            </p:nvSpPr>
+            <p:spPr>
+              <a:xfrm>
+                <a:off x="3908391" y="927556"/>
+                <a:ext cx="1928985" cy="445378"/>
+              </a:xfrm>
+              <a:prstGeom prst="rect">
+                <a:avLst/>
+              </a:prstGeom>
+              <a:blipFill>
+                <a:blip r:embed="rId4"/>
+                <a:stretch>
+                  <a:fillRect t="-1370" b="-5479"/>
+                </a:stretch>
+              </a:blipFill>
+            </p:spPr>
+            <p:txBody>
+              <a:bodyPr/>
+              <a:lstStyle/>
+              <a:p>
+                <a:r>
+                  <a:rPr lang="en-US">
+                    <a:noFill/>
+                  </a:rPr>
+                  <a:t> </a:t>
+                </a:r>
+              </a:p>
+            </p:txBody>
+          </p:sp>
+        </mc:Fallback>
+      </mc:AlternateContent>
+    </p:spTree>
+    <p:extLst>
+      <p:ext uri="{BB962C8B-B14F-4D97-AF65-F5344CB8AC3E}">
+        <p14:creationId xmlns:p14="http://schemas.microsoft.com/office/powerpoint/2010/main" val="2473605495"/>
+      </p:ext>
+    </p:extLst>
+  </p:cSld>
+  <p:clrMapOvr>
+    <a:masterClrMapping/>
+  </p:clrMapOvr>
+</p:sld>
+</file>
+
 <file path=ppt/slides/slide2.xml><?xml version="1.0" encoding="utf-8"?>
 <p:sld xmlns:a="http://schemas.openxmlformats.org/drawingml/2006/main" xmlns:r="http://schemas.openxmlformats.org/officeDocument/2006/relationships" xmlns:p="http://schemas.openxmlformats.org/presentationml/2006/main">
   <p:cSld>

--- a/MonteCarlo/MonteCarloProj/Presentation for West River.pptx
+++ b/MonteCarlo/MonteCarloProj/Presentation for West River.pptx
@@ -23,6 +23,8 @@
     <p:sldId id="279" r:id="rId17"/>
     <p:sldId id="280" r:id="rId18"/>
     <p:sldId id="281" r:id="rId19"/>
+    <p:sldId id="282" r:id="rId20"/>
+    <p:sldId id="283" r:id="rId21"/>
   </p:sldIdLst>
   <p:sldSz cx="12192000" cy="6858000"/>
   <p:notesSz cx="6858000" cy="9144000"/>
@@ -9132,6 +9134,371 @@
 </p:sld>
 </file>
 
+<file path=ppt/slides/slide19.xml><?xml version="1.0" encoding="utf-8"?>
+<p:sld xmlns:a="http://schemas.openxmlformats.org/drawingml/2006/main" xmlns:r="http://schemas.openxmlformats.org/officeDocument/2006/relationships" xmlns:p="http://schemas.openxmlformats.org/presentationml/2006/main">
+  <p:cSld>
+    <p:spTree>
+      <p:nvGrpSpPr>
+        <p:cNvPr id="1" name=""/>
+        <p:cNvGrpSpPr/>
+        <p:nvPr/>
+      </p:nvGrpSpPr>
+      <p:grpSpPr>
+        <a:xfrm>
+          <a:off x="0" y="0"/>
+          <a:ext cx="0" cy="0"/>
+          <a:chOff x="0" y="0"/>
+          <a:chExt cx="0" cy="0"/>
+        </a:xfrm>
+      </p:grpSpPr>
+      <p:pic>
+        <p:nvPicPr>
+          <p:cNvPr id="11" name="Picture 10">
+            <a:extLst>
+              <a:ext uri="{FF2B5EF4-FFF2-40B4-BE49-F238E27FC236}">
+                <a16:creationId xmlns:a16="http://schemas.microsoft.com/office/drawing/2014/main" id="{B6565BAA-2301-7451-36E9-D39A95C08C87}"/>
+              </a:ext>
+            </a:extLst>
+          </p:cNvPr>
+          <p:cNvPicPr>
+            <a:picLocks noChangeAspect="1"/>
+          </p:cNvPicPr>
+          <p:nvPr/>
+        </p:nvPicPr>
+        <p:blipFill>
+          <a:blip r:embed="rId2">
+            <a:extLst>
+              <a:ext uri="{28A0092B-C50C-407E-A947-70E740481C1C}">
+                <a14:useLocalDpi xmlns:a14="http://schemas.microsoft.com/office/drawing/2010/main" val="0"/>
+              </a:ext>
+            </a:extLst>
+          </a:blip>
+          <a:stretch>
+            <a:fillRect/>
+          </a:stretch>
+        </p:blipFill>
+        <p:spPr>
+          <a:xfrm>
+            <a:off x="1524000" y="0"/>
+            <a:ext cx="9144000" cy="6858000"/>
+          </a:xfrm>
+          <a:prstGeom prst="rect">
+            <a:avLst/>
+          </a:prstGeom>
+        </p:spPr>
+      </p:pic>
+      <p:cxnSp>
+        <p:nvCxnSpPr>
+          <p:cNvPr id="15" name="Straight Arrow Connector 14">
+            <a:extLst>
+              <a:ext uri="{FF2B5EF4-FFF2-40B4-BE49-F238E27FC236}">
+                <a16:creationId xmlns:a16="http://schemas.microsoft.com/office/drawing/2014/main" id="{2726CD68-6D14-CDB0-C0F5-0885DEA481F1}"/>
+              </a:ext>
+            </a:extLst>
+          </p:cNvPr>
+          <p:cNvCxnSpPr/>
+          <p:nvPr/>
+        </p:nvCxnSpPr>
+        <p:spPr>
+          <a:xfrm>
+            <a:off x="2767018" y="3252786"/>
+            <a:ext cx="461963" cy="0"/>
+          </a:xfrm>
+          <a:prstGeom prst="straightConnector1">
+            <a:avLst/>
+          </a:prstGeom>
+          <a:ln>
+            <a:tailEnd type="triangle"/>
+          </a:ln>
+        </p:spPr>
+        <p:style>
+          <a:lnRef idx="3">
+            <a:schemeClr val="accent3"/>
+          </a:lnRef>
+          <a:fillRef idx="0">
+            <a:schemeClr val="accent3"/>
+          </a:fillRef>
+          <a:effectRef idx="2">
+            <a:schemeClr val="accent3"/>
+          </a:effectRef>
+          <a:fontRef idx="minor">
+            <a:schemeClr val="tx1"/>
+          </a:fontRef>
+        </p:style>
+      </p:cxnSp>
+      <p:cxnSp>
+        <p:nvCxnSpPr>
+          <p:cNvPr id="17" name="Straight Connector 16">
+            <a:extLst>
+              <a:ext uri="{FF2B5EF4-FFF2-40B4-BE49-F238E27FC236}">
+                <a16:creationId xmlns:a16="http://schemas.microsoft.com/office/drawing/2014/main" id="{34C4DE47-CA65-2EA4-16EC-64D3F3FE5C7A}"/>
+              </a:ext>
+            </a:extLst>
+          </p:cNvPr>
+          <p:cNvCxnSpPr>
+            <a:cxnSpLocks/>
+          </p:cNvCxnSpPr>
+          <p:nvPr/>
+        </p:nvCxnSpPr>
+        <p:spPr>
+          <a:xfrm>
+            <a:off x="2714625" y="2624143"/>
+            <a:ext cx="5657850" cy="0"/>
+          </a:xfrm>
+          <a:prstGeom prst="line">
+            <a:avLst/>
+          </a:prstGeom>
+        </p:spPr>
+        <p:style>
+          <a:lnRef idx="1">
+            <a:schemeClr val="dk1"/>
+          </a:lnRef>
+          <a:fillRef idx="0">
+            <a:schemeClr val="dk1"/>
+          </a:fillRef>
+          <a:effectRef idx="0">
+            <a:schemeClr val="dk1"/>
+          </a:effectRef>
+          <a:fontRef idx="minor">
+            <a:schemeClr val="tx1"/>
+          </a:fontRef>
+        </p:style>
+      </p:cxnSp>
+      <p:cxnSp>
+        <p:nvCxnSpPr>
+          <p:cNvPr id="20" name="Straight Connector 19">
+            <a:extLst>
+              <a:ext uri="{FF2B5EF4-FFF2-40B4-BE49-F238E27FC236}">
+                <a16:creationId xmlns:a16="http://schemas.microsoft.com/office/drawing/2014/main" id="{2C948FBA-A5C8-DB5F-CCBE-CAC1844D4B83}"/>
+              </a:ext>
+            </a:extLst>
+          </p:cNvPr>
+          <p:cNvCxnSpPr>
+            <a:cxnSpLocks/>
+          </p:cNvCxnSpPr>
+          <p:nvPr/>
+        </p:nvCxnSpPr>
+        <p:spPr>
+          <a:xfrm>
+            <a:off x="2714625" y="2752731"/>
+            <a:ext cx="5657850" cy="0"/>
+          </a:xfrm>
+          <a:prstGeom prst="line">
+            <a:avLst/>
+          </a:prstGeom>
+        </p:spPr>
+        <p:style>
+          <a:lnRef idx="1">
+            <a:schemeClr val="dk1"/>
+          </a:lnRef>
+          <a:fillRef idx="0">
+            <a:schemeClr val="dk1"/>
+          </a:fillRef>
+          <a:effectRef idx="0">
+            <a:schemeClr val="dk1"/>
+          </a:effectRef>
+          <a:fontRef idx="minor">
+            <a:schemeClr val="tx1"/>
+          </a:fontRef>
+        </p:style>
+      </p:cxnSp>
+      <p:pic>
+        <p:nvPicPr>
+          <p:cNvPr id="22" name="Graphic 21" descr="Magnifying glass with solid fill">
+            <a:extLst>
+              <a:ext uri="{FF2B5EF4-FFF2-40B4-BE49-F238E27FC236}">
+                <a16:creationId xmlns:a16="http://schemas.microsoft.com/office/drawing/2014/main" id="{39911F8E-0344-5EDD-10E3-9D39D8096AF6}"/>
+              </a:ext>
+            </a:extLst>
+          </p:cNvPr>
+          <p:cNvPicPr>
+            <a:picLocks noChangeAspect="1"/>
+          </p:cNvPicPr>
+          <p:nvPr/>
+        </p:nvPicPr>
+        <p:blipFill>
+          <a:blip>
+            <a:extLst>
+              <a:ext uri="{96DAC541-7B7A-43D3-8B79-37D633B846F1}">
+                <asvg:svgBlip xmlns:asvg="http://schemas.microsoft.com/office/drawing/2016/SVG/main" r:embed="rId3"/>
+              </a:ext>
+            </a:extLst>
+          </a:blip>
+          <a:stretch>
+            <a:fillRect/>
+          </a:stretch>
+        </p:blipFill>
+        <p:spPr>
+          <a:xfrm>
+            <a:off x="2945606" y="2495554"/>
+            <a:ext cx="457199" cy="457199"/>
+          </a:xfrm>
+          <a:prstGeom prst="rect">
+            <a:avLst/>
+          </a:prstGeom>
+        </p:spPr>
+      </p:pic>
+      <p:pic>
+        <p:nvPicPr>
+          <p:cNvPr id="24" name="Graphic 23" descr="Magnifying glass with solid fill">
+            <a:extLst>
+              <a:ext uri="{FF2B5EF4-FFF2-40B4-BE49-F238E27FC236}">
+                <a16:creationId xmlns:a16="http://schemas.microsoft.com/office/drawing/2014/main" id="{23EBFE45-F981-D5CA-7096-3BBD1E5ADC35}"/>
+              </a:ext>
+            </a:extLst>
+          </p:cNvPr>
+          <p:cNvPicPr>
+            <a:picLocks noChangeAspect="1"/>
+          </p:cNvPicPr>
+          <p:nvPr/>
+        </p:nvPicPr>
+        <p:blipFill>
+          <a:blip>
+            <a:extLst>
+              <a:ext uri="{96DAC541-7B7A-43D3-8B79-37D633B846F1}">
+                <asvg:svgBlip xmlns:asvg="http://schemas.microsoft.com/office/drawing/2016/SVG/main" r:embed="rId3"/>
+              </a:ext>
+            </a:extLst>
+          </a:blip>
+          <a:stretch>
+            <a:fillRect/>
+          </a:stretch>
+        </p:blipFill>
+        <p:spPr>
+          <a:xfrm>
+            <a:off x="4457099" y="2495555"/>
+            <a:ext cx="457199" cy="457199"/>
+          </a:xfrm>
+          <a:prstGeom prst="rect">
+            <a:avLst/>
+          </a:prstGeom>
+        </p:spPr>
+      </p:pic>
+      <p:pic>
+        <p:nvPicPr>
+          <p:cNvPr id="26" name="Graphic 25" descr="Magnifying glass with solid fill">
+            <a:extLst>
+              <a:ext uri="{FF2B5EF4-FFF2-40B4-BE49-F238E27FC236}">
+                <a16:creationId xmlns:a16="http://schemas.microsoft.com/office/drawing/2014/main" id="{EB670656-E039-CF94-5F78-DFE98146314C}"/>
+              </a:ext>
+            </a:extLst>
+          </p:cNvPr>
+          <p:cNvPicPr>
+            <a:picLocks noChangeAspect="1"/>
+          </p:cNvPicPr>
+          <p:nvPr/>
+        </p:nvPicPr>
+        <p:blipFill>
+          <a:blip>
+            <a:extLst>
+              <a:ext uri="{96DAC541-7B7A-43D3-8B79-37D633B846F1}">
+                <asvg:svgBlip xmlns:asvg="http://schemas.microsoft.com/office/drawing/2016/SVG/main" r:embed="rId3"/>
+              </a:ext>
+            </a:extLst>
+          </a:blip>
+          <a:stretch>
+            <a:fillRect/>
+          </a:stretch>
+        </p:blipFill>
+        <p:spPr>
+          <a:xfrm>
+            <a:off x="7354496" y="2495555"/>
+            <a:ext cx="457199" cy="457199"/>
+          </a:xfrm>
+          <a:prstGeom prst="rect">
+            <a:avLst/>
+          </a:prstGeom>
+        </p:spPr>
+      </p:pic>
+      <p:cxnSp>
+        <p:nvCxnSpPr>
+          <p:cNvPr id="28" name="Straight Connector 27">
+            <a:extLst>
+              <a:ext uri="{FF2B5EF4-FFF2-40B4-BE49-F238E27FC236}">
+                <a16:creationId xmlns:a16="http://schemas.microsoft.com/office/drawing/2014/main" id="{7A4EEE27-7790-816F-93F0-6BAEAF9F8021}"/>
+              </a:ext>
+            </a:extLst>
+          </p:cNvPr>
+          <p:cNvCxnSpPr>
+            <a:cxnSpLocks/>
+          </p:cNvCxnSpPr>
+          <p:nvPr/>
+        </p:nvCxnSpPr>
+        <p:spPr>
+          <a:xfrm>
+            <a:off x="4495203" y="2686050"/>
+            <a:ext cx="0" cy="2052638"/>
+          </a:xfrm>
+          <a:prstGeom prst="line">
+            <a:avLst/>
+          </a:prstGeom>
+        </p:spPr>
+        <p:style>
+          <a:lnRef idx="1">
+            <a:schemeClr val="accent1"/>
+          </a:lnRef>
+          <a:fillRef idx="0">
+            <a:schemeClr val="accent1"/>
+          </a:fillRef>
+          <a:effectRef idx="0">
+            <a:schemeClr val="accent1"/>
+          </a:effectRef>
+          <a:fontRef idx="minor">
+            <a:schemeClr val="tx1"/>
+          </a:fontRef>
+        </p:style>
+      </p:cxnSp>
+      <p:cxnSp>
+        <p:nvCxnSpPr>
+          <p:cNvPr id="29" name="Straight Connector 28">
+            <a:extLst>
+              <a:ext uri="{FF2B5EF4-FFF2-40B4-BE49-F238E27FC236}">
+                <a16:creationId xmlns:a16="http://schemas.microsoft.com/office/drawing/2014/main" id="{A055ECCD-39FF-CCA8-7A12-51DBEE28A669}"/>
+              </a:ext>
+            </a:extLst>
+          </p:cNvPr>
+          <p:cNvCxnSpPr>
+            <a:cxnSpLocks/>
+          </p:cNvCxnSpPr>
+          <p:nvPr/>
+        </p:nvCxnSpPr>
+        <p:spPr>
+          <a:xfrm>
+            <a:off x="4776183" y="2686050"/>
+            <a:ext cx="0" cy="2052638"/>
+          </a:xfrm>
+          <a:prstGeom prst="line">
+            <a:avLst/>
+          </a:prstGeom>
+        </p:spPr>
+        <p:style>
+          <a:lnRef idx="1">
+            <a:schemeClr val="accent1"/>
+          </a:lnRef>
+          <a:fillRef idx="0">
+            <a:schemeClr val="accent1"/>
+          </a:fillRef>
+          <a:effectRef idx="0">
+            <a:schemeClr val="accent1"/>
+          </a:effectRef>
+          <a:fontRef idx="minor">
+            <a:schemeClr val="tx1"/>
+          </a:fontRef>
+        </p:style>
+      </p:cxnSp>
+    </p:spTree>
+    <p:extLst>
+      <p:ext uri="{BB962C8B-B14F-4D97-AF65-F5344CB8AC3E}">
+        <p14:creationId xmlns:p14="http://schemas.microsoft.com/office/powerpoint/2010/main" val="41725336"/>
+      </p:ext>
+    </p:extLst>
+  </p:cSld>
+  <p:clrMapOvr>
+    <a:masterClrMapping/>
+  </p:clrMapOvr>
+</p:sld>
+</file>
+
 <file path=ppt/slides/slide2.xml><?xml version="1.0" encoding="utf-8"?>
 <p:sld xmlns:a="http://schemas.openxmlformats.org/drawingml/2006/main" xmlns:r="http://schemas.openxmlformats.org/officeDocument/2006/relationships" xmlns:p="http://schemas.openxmlformats.org/presentationml/2006/main">
   <p:cSld>
@@ -9937,6 +10304,371 @@
     <p:extLst>
       <p:ext uri="{BB962C8B-B14F-4D97-AF65-F5344CB8AC3E}">
         <p14:creationId xmlns:p14="http://schemas.microsoft.com/office/powerpoint/2010/main" val="2867557785"/>
+      </p:ext>
+    </p:extLst>
+  </p:cSld>
+  <p:clrMapOvr>
+    <a:masterClrMapping/>
+  </p:clrMapOvr>
+</p:sld>
+</file>
+
+<file path=ppt/slides/slide20.xml><?xml version="1.0" encoding="utf-8"?>
+<p:sld xmlns:a="http://schemas.openxmlformats.org/drawingml/2006/main" xmlns:r="http://schemas.openxmlformats.org/officeDocument/2006/relationships" xmlns:p="http://schemas.openxmlformats.org/presentationml/2006/main">
+  <p:cSld>
+    <p:spTree>
+      <p:nvGrpSpPr>
+        <p:cNvPr id="1" name=""/>
+        <p:cNvGrpSpPr/>
+        <p:nvPr/>
+      </p:nvGrpSpPr>
+      <p:grpSpPr>
+        <a:xfrm>
+          <a:off x="0" y="0"/>
+          <a:ext cx="0" cy="0"/>
+          <a:chOff x="0" y="0"/>
+          <a:chExt cx="0" cy="0"/>
+        </a:xfrm>
+      </p:grpSpPr>
+      <p:pic>
+        <p:nvPicPr>
+          <p:cNvPr id="3" name="Picture 2">
+            <a:extLst>
+              <a:ext uri="{FF2B5EF4-FFF2-40B4-BE49-F238E27FC236}">
+                <a16:creationId xmlns:a16="http://schemas.microsoft.com/office/drawing/2014/main" id="{D79A481D-307C-847F-B2F1-0C2C98167834}"/>
+              </a:ext>
+            </a:extLst>
+          </p:cNvPr>
+          <p:cNvPicPr>
+            <a:picLocks noChangeAspect="1"/>
+          </p:cNvPicPr>
+          <p:nvPr/>
+        </p:nvPicPr>
+        <p:blipFill>
+          <a:blip r:embed="rId2">
+            <a:extLst>
+              <a:ext uri="{28A0092B-C50C-407E-A947-70E740481C1C}">
+                <a14:useLocalDpi xmlns:a14="http://schemas.microsoft.com/office/drawing/2010/main" val="0"/>
+              </a:ext>
+            </a:extLst>
+          </a:blip>
+          <a:stretch>
+            <a:fillRect/>
+          </a:stretch>
+        </p:blipFill>
+        <p:spPr>
+          <a:xfrm>
+            <a:off x="1524000" y="0"/>
+            <a:ext cx="9144000" cy="6858000"/>
+          </a:xfrm>
+          <a:prstGeom prst="rect">
+            <a:avLst/>
+          </a:prstGeom>
+        </p:spPr>
+      </p:pic>
+      <p:cxnSp>
+        <p:nvCxnSpPr>
+          <p:cNvPr id="5" name="Straight Arrow Connector 4">
+            <a:extLst>
+              <a:ext uri="{FF2B5EF4-FFF2-40B4-BE49-F238E27FC236}">
+                <a16:creationId xmlns:a16="http://schemas.microsoft.com/office/drawing/2014/main" id="{D5E44C2C-AE89-9A7E-0DBB-47A8EE8FEDA0}"/>
+              </a:ext>
+            </a:extLst>
+          </p:cNvPr>
+          <p:cNvCxnSpPr/>
+          <p:nvPr/>
+        </p:nvCxnSpPr>
+        <p:spPr>
+          <a:xfrm>
+            <a:off x="2767018" y="3252786"/>
+            <a:ext cx="461963" cy="0"/>
+          </a:xfrm>
+          <a:prstGeom prst="straightConnector1">
+            <a:avLst/>
+          </a:prstGeom>
+          <a:ln>
+            <a:tailEnd type="triangle"/>
+          </a:ln>
+        </p:spPr>
+        <p:style>
+          <a:lnRef idx="3">
+            <a:schemeClr val="accent3"/>
+          </a:lnRef>
+          <a:fillRef idx="0">
+            <a:schemeClr val="accent3"/>
+          </a:fillRef>
+          <a:effectRef idx="2">
+            <a:schemeClr val="accent3"/>
+          </a:effectRef>
+          <a:fontRef idx="minor">
+            <a:schemeClr val="tx1"/>
+          </a:fontRef>
+        </p:style>
+      </p:cxnSp>
+      <p:cxnSp>
+        <p:nvCxnSpPr>
+          <p:cNvPr id="6" name="Straight Connector 5">
+            <a:extLst>
+              <a:ext uri="{FF2B5EF4-FFF2-40B4-BE49-F238E27FC236}">
+                <a16:creationId xmlns:a16="http://schemas.microsoft.com/office/drawing/2014/main" id="{D0F42AF4-820B-6BFD-D357-C8D6B5D6F72A}"/>
+              </a:ext>
+            </a:extLst>
+          </p:cNvPr>
+          <p:cNvCxnSpPr>
+            <a:cxnSpLocks/>
+          </p:cNvCxnSpPr>
+          <p:nvPr/>
+        </p:nvCxnSpPr>
+        <p:spPr>
+          <a:xfrm>
+            <a:off x="2714625" y="2624143"/>
+            <a:ext cx="5657850" cy="0"/>
+          </a:xfrm>
+          <a:prstGeom prst="line">
+            <a:avLst/>
+          </a:prstGeom>
+        </p:spPr>
+        <p:style>
+          <a:lnRef idx="1">
+            <a:schemeClr val="dk1"/>
+          </a:lnRef>
+          <a:fillRef idx="0">
+            <a:schemeClr val="dk1"/>
+          </a:fillRef>
+          <a:effectRef idx="0">
+            <a:schemeClr val="dk1"/>
+          </a:effectRef>
+          <a:fontRef idx="minor">
+            <a:schemeClr val="tx1"/>
+          </a:fontRef>
+        </p:style>
+      </p:cxnSp>
+      <p:cxnSp>
+        <p:nvCxnSpPr>
+          <p:cNvPr id="7" name="Straight Connector 6">
+            <a:extLst>
+              <a:ext uri="{FF2B5EF4-FFF2-40B4-BE49-F238E27FC236}">
+                <a16:creationId xmlns:a16="http://schemas.microsoft.com/office/drawing/2014/main" id="{8FC9C1E3-57BF-581A-DBC1-D304040A83CB}"/>
+              </a:ext>
+            </a:extLst>
+          </p:cNvPr>
+          <p:cNvCxnSpPr>
+            <a:cxnSpLocks/>
+          </p:cNvCxnSpPr>
+          <p:nvPr/>
+        </p:nvCxnSpPr>
+        <p:spPr>
+          <a:xfrm>
+            <a:off x="2714625" y="2752731"/>
+            <a:ext cx="5657850" cy="0"/>
+          </a:xfrm>
+          <a:prstGeom prst="line">
+            <a:avLst/>
+          </a:prstGeom>
+        </p:spPr>
+        <p:style>
+          <a:lnRef idx="1">
+            <a:schemeClr val="dk1"/>
+          </a:lnRef>
+          <a:fillRef idx="0">
+            <a:schemeClr val="dk1"/>
+          </a:fillRef>
+          <a:effectRef idx="0">
+            <a:schemeClr val="dk1"/>
+          </a:effectRef>
+          <a:fontRef idx="minor">
+            <a:schemeClr val="tx1"/>
+          </a:fontRef>
+        </p:style>
+      </p:cxnSp>
+      <p:pic>
+        <p:nvPicPr>
+          <p:cNvPr id="8" name="Graphic 7" descr="Magnifying glass with solid fill">
+            <a:extLst>
+              <a:ext uri="{FF2B5EF4-FFF2-40B4-BE49-F238E27FC236}">
+                <a16:creationId xmlns:a16="http://schemas.microsoft.com/office/drawing/2014/main" id="{C7D21AF2-C79F-C3BD-BF02-19805959A52B}"/>
+              </a:ext>
+            </a:extLst>
+          </p:cNvPr>
+          <p:cNvPicPr>
+            <a:picLocks noChangeAspect="1"/>
+          </p:cNvPicPr>
+          <p:nvPr/>
+        </p:nvPicPr>
+        <p:blipFill>
+          <a:blip>
+            <a:extLst>
+              <a:ext uri="{96DAC541-7B7A-43D3-8B79-37D633B846F1}">
+                <asvg:svgBlip xmlns:asvg="http://schemas.microsoft.com/office/drawing/2016/SVG/main" r:embed="rId3"/>
+              </a:ext>
+            </a:extLst>
+          </a:blip>
+          <a:stretch>
+            <a:fillRect/>
+          </a:stretch>
+        </p:blipFill>
+        <p:spPr>
+          <a:xfrm>
+            <a:off x="2945606" y="2495554"/>
+            <a:ext cx="457199" cy="457199"/>
+          </a:xfrm>
+          <a:prstGeom prst="rect">
+            <a:avLst/>
+          </a:prstGeom>
+        </p:spPr>
+      </p:pic>
+      <p:pic>
+        <p:nvPicPr>
+          <p:cNvPr id="9" name="Graphic 8" descr="Magnifying glass with solid fill">
+            <a:extLst>
+              <a:ext uri="{FF2B5EF4-FFF2-40B4-BE49-F238E27FC236}">
+                <a16:creationId xmlns:a16="http://schemas.microsoft.com/office/drawing/2014/main" id="{DCFD35F9-3519-E81C-26FD-65AEB3273B88}"/>
+              </a:ext>
+            </a:extLst>
+          </p:cNvPr>
+          <p:cNvPicPr>
+            <a:picLocks noChangeAspect="1"/>
+          </p:cNvPicPr>
+          <p:nvPr/>
+        </p:nvPicPr>
+        <p:blipFill>
+          <a:blip>
+            <a:extLst>
+              <a:ext uri="{96DAC541-7B7A-43D3-8B79-37D633B846F1}">
+                <asvg:svgBlip xmlns:asvg="http://schemas.microsoft.com/office/drawing/2016/SVG/main" r:embed="rId3"/>
+              </a:ext>
+            </a:extLst>
+          </a:blip>
+          <a:stretch>
+            <a:fillRect/>
+          </a:stretch>
+        </p:blipFill>
+        <p:spPr>
+          <a:xfrm>
+            <a:off x="3937980" y="2495555"/>
+            <a:ext cx="457199" cy="457199"/>
+          </a:xfrm>
+          <a:prstGeom prst="rect">
+            <a:avLst/>
+          </a:prstGeom>
+        </p:spPr>
+      </p:pic>
+      <p:pic>
+        <p:nvPicPr>
+          <p:cNvPr id="10" name="Graphic 9" descr="Magnifying glass with solid fill">
+            <a:extLst>
+              <a:ext uri="{FF2B5EF4-FFF2-40B4-BE49-F238E27FC236}">
+                <a16:creationId xmlns:a16="http://schemas.microsoft.com/office/drawing/2014/main" id="{1EB81947-DBD2-4362-A8F5-2E35026353C9}"/>
+              </a:ext>
+            </a:extLst>
+          </p:cNvPr>
+          <p:cNvPicPr>
+            <a:picLocks noChangeAspect="1"/>
+          </p:cNvPicPr>
+          <p:nvPr/>
+        </p:nvPicPr>
+        <p:blipFill>
+          <a:blip>
+            <a:extLst>
+              <a:ext uri="{96DAC541-7B7A-43D3-8B79-37D633B846F1}">
+                <asvg:svgBlip xmlns:asvg="http://schemas.microsoft.com/office/drawing/2016/SVG/main" r:embed="rId3"/>
+              </a:ext>
+            </a:extLst>
+          </a:blip>
+          <a:stretch>
+            <a:fillRect/>
+          </a:stretch>
+        </p:blipFill>
+        <p:spPr>
+          <a:xfrm>
+            <a:off x="5797147" y="2495555"/>
+            <a:ext cx="457199" cy="457199"/>
+          </a:xfrm>
+          <a:prstGeom prst="rect">
+            <a:avLst/>
+          </a:prstGeom>
+        </p:spPr>
+      </p:pic>
+      <p:cxnSp>
+        <p:nvCxnSpPr>
+          <p:cNvPr id="11" name="Straight Connector 10">
+            <a:extLst>
+              <a:ext uri="{FF2B5EF4-FFF2-40B4-BE49-F238E27FC236}">
+                <a16:creationId xmlns:a16="http://schemas.microsoft.com/office/drawing/2014/main" id="{5FEC0EB9-5106-1402-D101-A1020E1D4F98}"/>
+              </a:ext>
+            </a:extLst>
+          </p:cNvPr>
+          <p:cNvCxnSpPr>
+            <a:cxnSpLocks/>
+          </p:cNvCxnSpPr>
+          <p:nvPr/>
+        </p:nvCxnSpPr>
+        <p:spPr>
+          <a:xfrm>
+            <a:off x="3976084" y="2686050"/>
+            <a:ext cx="0" cy="2052638"/>
+          </a:xfrm>
+          <a:prstGeom prst="line">
+            <a:avLst/>
+          </a:prstGeom>
+        </p:spPr>
+        <p:style>
+          <a:lnRef idx="1">
+            <a:schemeClr val="accent1"/>
+          </a:lnRef>
+          <a:fillRef idx="0">
+            <a:schemeClr val="accent1"/>
+          </a:fillRef>
+          <a:effectRef idx="0">
+            <a:schemeClr val="accent1"/>
+          </a:effectRef>
+          <a:fontRef idx="minor">
+            <a:schemeClr val="tx1"/>
+          </a:fontRef>
+        </p:style>
+      </p:cxnSp>
+      <p:cxnSp>
+        <p:nvCxnSpPr>
+          <p:cNvPr id="12" name="Straight Connector 11">
+            <a:extLst>
+              <a:ext uri="{FF2B5EF4-FFF2-40B4-BE49-F238E27FC236}">
+                <a16:creationId xmlns:a16="http://schemas.microsoft.com/office/drawing/2014/main" id="{1ED7B982-F4D4-8F47-A101-11DE9425D99C}"/>
+              </a:ext>
+            </a:extLst>
+          </p:cNvPr>
+          <p:cNvCxnSpPr>
+            <a:cxnSpLocks/>
+          </p:cNvCxnSpPr>
+          <p:nvPr/>
+        </p:nvCxnSpPr>
+        <p:spPr>
+          <a:xfrm>
+            <a:off x="4257064" y="2686050"/>
+            <a:ext cx="0" cy="2052638"/>
+          </a:xfrm>
+          <a:prstGeom prst="line">
+            <a:avLst/>
+          </a:prstGeom>
+        </p:spPr>
+        <p:style>
+          <a:lnRef idx="1">
+            <a:schemeClr val="accent1"/>
+          </a:lnRef>
+          <a:fillRef idx="0">
+            <a:schemeClr val="accent1"/>
+          </a:fillRef>
+          <a:effectRef idx="0">
+            <a:schemeClr val="accent1"/>
+          </a:effectRef>
+          <a:fontRef idx="minor">
+            <a:schemeClr val="tx1"/>
+          </a:fontRef>
+        </p:style>
+      </p:cxnSp>
+    </p:spTree>
+    <p:extLst>
+      <p:ext uri="{BB962C8B-B14F-4D97-AF65-F5344CB8AC3E}">
+        <p14:creationId xmlns:p14="http://schemas.microsoft.com/office/powerpoint/2010/main" val="279961343"/>
       </p:ext>
     </p:extLst>
   </p:cSld>
